--- a/SQL/Intro To SQL Day 3.pptx
+++ b/SQL/Intro To SQL Day 3.pptx
@@ -283,7 +283,7 @@
           <a:p>
             <a:fld id="{046598D6-C04D-9446-A58F-36E01C46C344}" type="datetimeFigureOut">
               <a:rPr lang="en-US" smtClean="0"/>
-              <a:t>12/26/24</a:t>
+              <a:t>7/22/26</a:t>
             </a:fld>
             <a:endParaRPr lang="en-US"/>
           </a:p>
@@ -481,7 +481,7 @@
           <a:p>
             <a:fld id="{046598D6-C04D-9446-A58F-36E01C46C344}" type="datetimeFigureOut">
               <a:rPr lang="en-US" smtClean="0"/>
-              <a:t>12/26/24</a:t>
+              <a:t>7/22/26</a:t>
             </a:fld>
             <a:endParaRPr lang="en-US"/>
           </a:p>
@@ -689,7 +689,7 @@
           <a:p>
             <a:fld id="{046598D6-C04D-9446-A58F-36E01C46C344}" type="datetimeFigureOut">
               <a:rPr lang="en-US" smtClean="0"/>
-              <a:t>12/26/24</a:t>
+              <a:t>7/22/26</a:t>
             </a:fld>
             <a:endParaRPr lang="en-US"/>
           </a:p>
@@ -887,7 +887,7 @@
           <a:p>
             <a:fld id="{046598D6-C04D-9446-A58F-36E01C46C344}" type="datetimeFigureOut">
               <a:rPr lang="en-US" smtClean="0"/>
-              <a:t>12/26/24</a:t>
+              <a:t>7/22/26</a:t>
             </a:fld>
             <a:endParaRPr lang="en-US"/>
           </a:p>
@@ -1162,7 +1162,7 @@
           <a:p>
             <a:fld id="{046598D6-C04D-9446-A58F-36E01C46C344}" type="datetimeFigureOut">
               <a:rPr lang="en-US" smtClean="0"/>
-              <a:t>12/26/24</a:t>
+              <a:t>7/22/26</a:t>
             </a:fld>
             <a:endParaRPr lang="en-US"/>
           </a:p>
@@ -1427,7 +1427,7 @@
           <a:p>
             <a:fld id="{046598D6-C04D-9446-A58F-36E01C46C344}" type="datetimeFigureOut">
               <a:rPr lang="en-US" smtClean="0"/>
-              <a:t>12/26/24</a:t>
+              <a:t>7/22/26</a:t>
             </a:fld>
             <a:endParaRPr lang="en-US"/>
           </a:p>
@@ -1839,7 +1839,7 @@
           <a:p>
             <a:fld id="{046598D6-C04D-9446-A58F-36E01C46C344}" type="datetimeFigureOut">
               <a:rPr lang="en-US" smtClean="0"/>
-              <a:t>12/26/24</a:t>
+              <a:t>7/22/26</a:t>
             </a:fld>
             <a:endParaRPr lang="en-US"/>
           </a:p>
@@ -1980,7 +1980,7 @@
           <a:p>
             <a:fld id="{046598D6-C04D-9446-A58F-36E01C46C344}" type="datetimeFigureOut">
               <a:rPr lang="en-US" smtClean="0"/>
-              <a:t>12/26/24</a:t>
+              <a:t>7/22/26</a:t>
             </a:fld>
             <a:endParaRPr lang="en-US"/>
           </a:p>
@@ -2093,7 +2093,7 @@
           <a:p>
             <a:fld id="{046598D6-C04D-9446-A58F-36E01C46C344}" type="datetimeFigureOut">
               <a:rPr lang="en-US" smtClean="0"/>
-              <a:t>12/26/24</a:t>
+              <a:t>7/22/26</a:t>
             </a:fld>
             <a:endParaRPr lang="en-US"/>
           </a:p>
@@ -2404,7 +2404,7 @@
           <a:p>
             <a:fld id="{046598D6-C04D-9446-A58F-36E01C46C344}" type="datetimeFigureOut">
               <a:rPr lang="en-US" smtClean="0"/>
-              <a:t>12/26/24</a:t>
+              <a:t>7/22/26</a:t>
             </a:fld>
             <a:endParaRPr lang="en-US"/>
           </a:p>
@@ -2692,7 +2692,7 @@
           <a:p>
             <a:fld id="{046598D6-C04D-9446-A58F-36E01C46C344}" type="datetimeFigureOut">
               <a:rPr lang="en-US" smtClean="0"/>
-              <a:t>12/26/24</a:t>
+              <a:t>7/22/26</a:t>
             </a:fld>
             <a:endParaRPr lang="en-US"/>
           </a:p>
@@ -2933,7 +2933,7 @@
           <a:p>
             <a:fld id="{046598D6-C04D-9446-A58F-36E01C46C344}" type="datetimeFigureOut">
               <a:rPr lang="en-US" smtClean="0"/>
-              <a:t>12/26/24</a:t>
+              <a:t>7/22/26</a:t>
             </a:fld>
             <a:endParaRPr lang="en-US"/>
           </a:p>
@@ -9569,7 +9569,7 @@
         </p:nvSpPr>
         <p:spPr>
           <a:xfrm>
-            <a:off x="846083" y="1857156"/>
+            <a:off x="1062468" y="1857155"/>
             <a:ext cx="10515600" cy="4351338"/>
           </a:xfrm>
         </p:spPr>

--- a/SQL/Intro To SQL Day 3.pptx
+++ b/SQL/Intro To SQL Day 3.pptx
@@ -16,18 +16,18 @@
     <p:sldId id="286" r:id="rId10"/>
     <p:sldId id="269" r:id="rId11"/>
     <p:sldId id="287" r:id="rId12"/>
-    <p:sldId id="281" r:id="rId13"/>
-    <p:sldId id="257" r:id="rId14"/>
-    <p:sldId id="293" r:id="rId15"/>
-    <p:sldId id="258" r:id="rId16"/>
-    <p:sldId id="288" r:id="rId17"/>
-    <p:sldId id="289" r:id="rId18"/>
-    <p:sldId id="282" r:id="rId19"/>
-    <p:sldId id="261" r:id="rId20"/>
-    <p:sldId id="285" r:id="rId21"/>
-    <p:sldId id="290" r:id="rId22"/>
-    <p:sldId id="291" r:id="rId23"/>
-    <p:sldId id="292" r:id="rId24"/>
+    <p:sldId id="295" r:id="rId13"/>
+    <p:sldId id="281" r:id="rId14"/>
+    <p:sldId id="257" r:id="rId15"/>
+    <p:sldId id="293" r:id="rId16"/>
+    <p:sldId id="258" r:id="rId17"/>
+    <p:sldId id="288" r:id="rId18"/>
+    <p:sldId id="289" r:id="rId19"/>
+    <p:sldId id="282" r:id="rId20"/>
+    <p:sldId id="261" r:id="rId21"/>
+    <p:sldId id="285" r:id="rId22"/>
+    <p:sldId id="290" r:id="rId23"/>
+    <p:sldId id="291" r:id="rId24"/>
     <p:sldId id="294" r:id="rId25"/>
     <p:sldId id="266" r:id="rId26"/>
   </p:sldIdLst>
@@ -283,7 +283,7 @@
           <a:p>
             <a:fld id="{046598D6-C04D-9446-A58F-36E01C46C344}" type="datetimeFigureOut">
               <a:rPr lang="en-US" smtClean="0"/>
-              <a:t>7/22/26</a:t>
+              <a:t>7/25/26</a:t>
             </a:fld>
             <a:endParaRPr lang="en-US"/>
           </a:p>
@@ -481,7 +481,7 @@
           <a:p>
             <a:fld id="{046598D6-C04D-9446-A58F-36E01C46C344}" type="datetimeFigureOut">
               <a:rPr lang="en-US" smtClean="0"/>
-              <a:t>7/22/26</a:t>
+              <a:t>7/25/26</a:t>
             </a:fld>
             <a:endParaRPr lang="en-US"/>
           </a:p>
@@ -689,7 +689,7 @@
           <a:p>
             <a:fld id="{046598D6-C04D-9446-A58F-36E01C46C344}" type="datetimeFigureOut">
               <a:rPr lang="en-US" smtClean="0"/>
-              <a:t>7/22/26</a:t>
+              <a:t>7/25/26</a:t>
             </a:fld>
             <a:endParaRPr lang="en-US"/>
           </a:p>
@@ -887,7 +887,7 @@
           <a:p>
             <a:fld id="{046598D6-C04D-9446-A58F-36E01C46C344}" type="datetimeFigureOut">
               <a:rPr lang="en-US" smtClean="0"/>
-              <a:t>7/22/26</a:t>
+              <a:t>7/25/26</a:t>
             </a:fld>
             <a:endParaRPr lang="en-US"/>
           </a:p>
@@ -1162,7 +1162,7 @@
           <a:p>
             <a:fld id="{046598D6-C04D-9446-A58F-36E01C46C344}" type="datetimeFigureOut">
               <a:rPr lang="en-US" smtClean="0"/>
-              <a:t>7/22/26</a:t>
+              <a:t>7/25/26</a:t>
             </a:fld>
             <a:endParaRPr lang="en-US"/>
           </a:p>
@@ -1427,7 +1427,7 @@
           <a:p>
             <a:fld id="{046598D6-C04D-9446-A58F-36E01C46C344}" type="datetimeFigureOut">
               <a:rPr lang="en-US" smtClean="0"/>
-              <a:t>7/22/26</a:t>
+              <a:t>7/25/26</a:t>
             </a:fld>
             <a:endParaRPr lang="en-US"/>
           </a:p>
@@ -1839,7 +1839,7 @@
           <a:p>
             <a:fld id="{046598D6-C04D-9446-A58F-36E01C46C344}" type="datetimeFigureOut">
               <a:rPr lang="en-US" smtClean="0"/>
-              <a:t>7/22/26</a:t>
+              <a:t>7/25/26</a:t>
             </a:fld>
             <a:endParaRPr lang="en-US"/>
           </a:p>
@@ -1980,7 +1980,7 @@
           <a:p>
             <a:fld id="{046598D6-C04D-9446-A58F-36E01C46C344}" type="datetimeFigureOut">
               <a:rPr lang="en-US" smtClean="0"/>
-              <a:t>7/22/26</a:t>
+              <a:t>7/25/26</a:t>
             </a:fld>
             <a:endParaRPr lang="en-US"/>
           </a:p>
@@ -2093,7 +2093,7 @@
           <a:p>
             <a:fld id="{046598D6-C04D-9446-A58F-36E01C46C344}" type="datetimeFigureOut">
               <a:rPr lang="en-US" smtClean="0"/>
-              <a:t>7/22/26</a:t>
+              <a:t>7/25/26</a:t>
             </a:fld>
             <a:endParaRPr lang="en-US"/>
           </a:p>
@@ -2404,7 +2404,7 @@
           <a:p>
             <a:fld id="{046598D6-C04D-9446-A58F-36E01C46C344}" type="datetimeFigureOut">
               <a:rPr lang="en-US" smtClean="0"/>
-              <a:t>7/22/26</a:t>
+              <a:t>7/25/26</a:t>
             </a:fld>
             <a:endParaRPr lang="en-US"/>
           </a:p>
@@ -2692,7 +2692,7 @@
           <a:p>
             <a:fld id="{046598D6-C04D-9446-A58F-36E01C46C344}" type="datetimeFigureOut">
               <a:rPr lang="en-US" smtClean="0"/>
-              <a:t>7/22/26</a:t>
+              <a:t>7/25/26</a:t>
             </a:fld>
             <a:endParaRPr lang="en-US"/>
           </a:p>
@@ -2933,7 +2933,7 @@
           <a:p>
             <a:fld id="{046598D6-C04D-9446-A58F-36E01C46C344}" type="datetimeFigureOut">
               <a:rPr lang="en-US" smtClean="0"/>
-              <a:t>7/22/26</a:t>
+              <a:t>7/25/26</a:t>
             </a:fld>
             <a:endParaRPr lang="en-US"/>
           </a:p>
@@ -3702,6 +3702,313 @@
           <a:lstStyle/>
           <a:p>
             <a:r>
+              <a:rPr lang="en-US" dirty="0"/>
+              <a:t>INNER JOIN</a:t>
+            </a:r>
+          </a:p>
+        </p:txBody>
+      </p:sp>
+      <p:sp>
+        <p:nvSpPr>
+          <p:cNvPr id="3" name="Content Placeholder 2">
+            <a:extLst>
+              <a:ext uri="{FF2B5EF4-FFF2-40B4-BE49-F238E27FC236}">
+                <a16:creationId xmlns:a16="http://schemas.microsoft.com/office/drawing/2014/main" id="{849FC325-0A7E-B75C-A05F-775B7306F8BE}"/>
+              </a:ext>
+            </a:extLst>
+          </p:cNvPr>
+          <p:cNvSpPr>
+            <a:spLocks noGrp="1"/>
+          </p:cNvSpPr>
+          <p:nvPr>
+            <p:ph idx="1"/>
+          </p:nvPr>
+        </p:nvSpPr>
+        <p:spPr/>
+        <p:txBody>
+          <a:bodyPr/>
+          <a:lstStyle/>
+          <a:p>
+            <a:pPr marL="0" indent="0">
+              <a:buNone/>
+            </a:pPr>
+            <a:r>
+              <a:rPr lang="en-US" sz="1800" dirty="0">
+                <a:solidFill>
+                  <a:srgbClr val="3367D6"/>
+                </a:solidFill>
+                <a:latin typeface="Roboto Mono" pitchFamily="49" charset="0"/>
+              </a:rPr>
+              <a:t>SELECT </a:t>
+            </a:r>
+            <a:r>
+              <a:rPr lang="en-US" sz="1800" dirty="0" err="1">
+                <a:solidFill>
+                  <a:srgbClr val="3367D6"/>
+                </a:solidFill>
+                <a:latin typeface="Roboto Mono" pitchFamily="49" charset="0"/>
+              </a:rPr>
+              <a:t>customer.firstName</a:t>
+            </a:r>
+            <a:r>
+              <a:rPr lang="en-US" sz="1800" dirty="0">
+                <a:solidFill>
+                  <a:srgbClr val="3367D6"/>
+                </a:solidFill>
+                <a:latin typeface="Roboto Mono" pitchFamily="49" charset="0"/>
+              </a:rPr>
+              <a:t>, </a:t>
+            </a:r>
+            <a:r>
+              <a:rPr lang="en-US" sz="1800" dirty="0" err="1">
+                <a:solidFill>
+                  <a:srgbClr val="3367D6"/>
+                </a:solidFill>
+                <a:latin typeface="Roboto Mono" pitchFamily="49" charset="0"/>
+              </a:rPr>
+              <a:t>customer.lastName</a:t>
+            </a:r>
+            <a:r>
+              <a:rPr lang="en-US" sz="1800" dirty="0">
+                <a:solidFill>
+                  <a:srgbClr val="3367D6"/>
+                </a:solidFill>
+                <a:latin typeface="Roboto Mono" pitchFamily="49" charset="0"/>
+              </a:rPr>
+              <a:t>, </a:t>
+            </a:r>
+            <a:r>
+              <a:rPr lang="en-US" sz="1800" dirty="0" err="1">
+                <a:solidFill>
+                  <a:srgbClr val="3367D6"/>
+                </a:solidFill>
+                <a:latin typeface="Roboto Mono" pitchFamily="49" charset="0"/>
+              </a:rPr>
+              <a:t>orders.datePlaced</a:t>
+            </a:r>
+            <a:endParaRPr lang="en-US" sz="1800" dirty="0">
+              <a:solidFill>
+                <a:srgbClr val="3367D6"/>
+              </a:solidFill>
+              <a:latin typeface="Roboto Mono" pitchFamily="49" charset="0"/>
+            </a:endParaRPr>
+          </a:p>
+          <a:p>
+            <a:pPr marL="0" indent="0">
+              <a:buNone/>
+            </a:pPr>
+            <a:r>
+              <a:rPr lang="en-US" sz="1800" dirty="0">
+                <a:solidFill>
+                  <a:srgbClr val="3367D6"/>
+                </a:solidFill>
+                <a:latin typeface="Roboto Mono" pitchFamily="49" charset="0"/>
+              </a:rPr>
+              <a:t>FROM customer </a:t>
+            </a:r>
+          </a:p>
+          <a:p>
+            <a:pPr marL="0" indent="0">
+              <a:buNone/>
+            </a:pPr>
+            <a:r>
+              <a:rPr lang="en-US" sz="1800" dirty="0">
+                <a:solidFill>
+                  <a:srgbClr val="3367D6"/>
+                </a:solidFill>
+                <a:latin typeface="Roboto Mono" pitchFamily="49" charset="0"/>
+              </a:rPr>
+              <a:t>JOIN orders ON </a:t>
+            </a:r>
+            <a:r>
+              <a:rPr lang="en-US" sz="1800" dirty="0" err="1">
+                <a:solidFill>
+                  <a:srgbClr val="3367D6"/>
+                </a:solidFill>
+                <a:latin typeface="Roboto Mono" pitchFamily="49" charset="0"/>
+              </a:rPr>
+              <a:t>customer.ID</a:t>
+            </a:r>
+            <a:r>
+              <a:rPr lang="en-US" sz="1800" dirty="0">
+                <a:solidFill>
+                  <a:srgbClr val="3367D6"/>
+                </a:solidFill>
+                <a:latin typeface="Roboto Mono" pitchFamily="49" charset="0"/>
+              </a:rPr>
+              <a:t> = </a:t>
+            </a:r>
+            <a:r>
+              <a:rPr lang="en-US" sz="1800" dirty="0" err="1">
+                <a:solidFill>
+                  <a:srgbClr val="3367D6"/>
+                </a:solidFill>
+                <a:latin typeface="Roboto Mono" pitchFamily="49" charset="0"/>
+              </a:rPr>
+              <a:t>orders.customerId</a:t>
+            </a:r>
+            <a:endParaRPr lang="en-US" sz="1800" dirty="0">
+              <a:solidFill>
+                <a:srgbClr val="3367D6"/>
+              </a:solidFill>
+              <a:latin typeface="Roboto Mono" pitchFamily="49" charset="0"/>
+            </a:endParaRPr>
+          </a:p>
+          <a:p>
+            <a:pPr marL="0" indent="0">
+              <a:buNone/>
+            </a:pPr>
+            <a:r>
+              <a:rPr lang="en-US" sz="1800" dirty="0">
+                <a:solidFill>
+                  <a:srgbClr val="3367D6"/>
+                </a:solidFill>
+                <a:latin typeface="Roboto Mono" pitchFamily="49" charset="0"/>
+              </a:rPr>
+              <a:t>ORDER BY </a:t>
+            </a:r>
+            <a:r>
+              <a:rPr lang="en-US" sz="1800" dirty="0" err="1">
+                <a:solidFill>
+                  <a:srgbClr val="3367D6"/>
+                </a:solidFill>
+                <a:latin typeface="Roboto Mono" pitchFamily="49" charset="0"/>
+              </a:rPr>
+              <a:t>lastName</a:t>
+            </a:r>
+            <a:r>
+              <a:rPr lang="en-US" sz="1800" dirty="0">
+                <a:solidFill>
+                  <a:srgbClr val="3367D6"/>
+                </a:solidFill>
+                <a:latin typeface="Roboto Mono" pitchFamily="49" charset="0"/>
+              </a:rPr>
+              <a:t> DESC, </a:t>
+            </a:r>
+            <a:r>
+              <a:rPr lang="en-US" sz="1800" dirty="0" err="1">
+                <a:solidFill>
+                  <a:srgbClr val="3367D6"/>
+                </a:solidFill>
+                <a:latin typeface="Roboto Mono" pitchFamily="49" charset="0"/>
+              </a:rPr>
+              <a:t>firstName</a:t>
+            </a:r>
+            <a:r>
+              <a:rPr lang="en-US" sz="1800" dirty="0">
+                <a:solidFill>
+                  <a:srgbClr val="3367D6"/>
+                </a:solidFill>
+                <a:latin typeface="Roboto Mono" pitchFamily="49" charset="0"/>
+              </a:rPr>
+              <a:t>;</a:t>
+            </a:r>
+            <a:endParaRPr lang="en-US" sz="1800" dirty="0">
+              <a:solidFill>
+                <a:srgbClr val="3367D6"/>
+              </a:solidFill>
+              <a:highlight>
+                <a:srgbClr val="FFFFFF"/>
+              </a:highlight>
+              <a:latin typeface="Roboto Mono" pitchFamily="49" charset="0"/>
+            </a:endParaRPr>
+          </a:p>
+          <a:p>
+            <a:pPr marL="0" indent="0">
+              <a:buNone/>
+            </a:pPr>
+            <a:endParaRPr lang="en-US" dirty="0"/>
+          </a:p>
+        </p:txBody>
+      </p:sp>
+      <p:pic>
+        <p:nvPicPr>
+          <p:cNvPr id="5" name="Picture 4">
+            <a:extLst>
+              <a:ext uri="{FF2B5EF4-FFF2-40B4-BE49-F238E27FC236}">
+                <a16:creationId xmlns:a16="http://schemas.microsoft.com/office/drawing/2014/main" id="{B927765D-E0B0-BF7B-9A0A-56BC986ADE41}"/>
+              </a:ext>
+            </a:extLst>
+          </p:cNvPr>
+          <p:cNvPicPr>
+            <a:picLocks noChangeAspect="1"/>
+          </p:cNvPicPr>
+          <p:nvPr/>
+        </p:nvPicPr>
+        <p:blipFill>
+          <a:blip r:embed="rId2"/>
+          <a:stretch>
+            <a:fillRect/>
+          </a:stretch>
+        </p:blipFill>
+        <p:spPr>
+          <a:xfrm>
+            <a:off x="956329" y="3851668"/>
+            <a:ext cx="4482445" cy="1940452"/>
+          </a:xfrm>
+          <a:prstGeom prst="rect">
+            <a:avLst/>
+          </a:prstGeom>
+        </p:spPr>
+      </p:pic>
+    </p:spTree>
+    <p:extLst>
+      <p:ext uri="{BB962C8B-B14F-4D97-AF65-F5344CB8AC3E}">
+        <p14:creationId xmlns:p14="http://schemas.microsoft.com/office/powerpoint/2010/main" val="3589307946"/>
+      </p:ext>
+    </p:extLst>
+  </p:cSld>
+  <p:clrMapOvr>
+    <a:masterClrMapping/>
+  </p:clrMapOvr>
+</p:sld>
+</file>
+
+<file path=ppt/slides/slide12.xml><?xml version="1.0" encoding="utf-8"?>
+<p:sld xmlns:a="http://schemas.openxmlformats.org/drawingml/2006/main" xmlns:r="http://schemas.openxmlformats.org/officeDocument/2006/relationships" xmlns:p="http://schemas.openxmlformats.org/presentationml/2006/main">
+  <p:cSld>
+    <p:spTree>
+      <p:nvGrpSpPr>
+        <p:cNvPr id="1" name="">
+          <a:extLst>
+            <a:ext uri="{FF2B5EF4-FFF2-40B4-BE49-F238E27FC236}">
+              <a16:creationId xmlns:a16="http://schemas.microsoft.com/office/drawing/2014/main" id="{05D03672-33C0-D0D4-78BD-37D6622C206B}"/>
+            </a:ext>
+          </a:extLst>
+        </p:cNvPr>
+        <p:cNvGrpSpPr/>
+        <p:nvPr/>
+      </p:nvGrpSpPr>
+      <p:grpSpPr>
+        <a:xfrm>
+          <a:off x="0" y="0"/>
+          <a:ext cx="0" cy="0"/>
+          <a:chOff x="0" y="0"/>
+          <a:chExt cx="0" cy="0"/>
+        </a:xfrm>
+      </p:grpSpPr>
+      <p:sp>
+        <p:nvSpPr>
+          <p:cNvPr id="2" name="Title 1">
+            <a:extLst>
+              <a:ext uri="{FF2B5EF4-FFF2-40B4-BE49-F238E27FC236}">
+                <a16:creationId xmlns:a16="http://schemas.microsoft.com/office/drawing/2014/main" id="{7EDB7EAD-728E-6A1C-8CB7-54F11521970E}"/>
+              </a:ext>
+            </a:extLst>
+          </p:cNvPr>
+          <p:cNvSpPr>
+            <a:spLocks noGrp="1"/>
+          </p:cNvSpPr>
+          <p:nvPr>
+            <p:ph type="title"/>
+          </p:nvPr>
+        </p:nvSpPr>
+        <p:spPr/>
+        <p:txBody>
+          <a:bodyPr/>
+          <a:lstStyle/>
+          <a:p>
+            <a:r>
               <a:rPr lang="en-US" dirty="0" err="1"/>
               <a:t>SubQuery</a:t>
             </a:r>
@@ -3717,7 +4024,7 @@
           <p:cNvPr id="3" name="Content Placeholder 2">
             <a:extLst>
               <a:ext uri="{FF2B5EF4-FFF2-40B4-BE49-F238E27FC236}">
-                <a16:creationId xmlns:a16="http://schemas.microsoft.com/office/drawing/2014/main" id="{849FC325-0A7E-B75C-A05F-775B7306F8BE}"/>
+                <a16:creationId xmlns:a16="http://schemas.microsoft.com/office/drawing/2014/main" id="{BA66E6E2-700B-D5CC-6F19-20B0C999D3DB}"/>
               </a:ext>
             </a:extLst>
           </p:cNvPr>
@@ -3918,7 +4225,7 @@
                 </a:highlight>
                 <a:latin typeface="Roboto Mono" pitchFamily="49" charset="0"/>
               </a:rPr>
-              <a:t>) AS </a:t>
+              <a:t>) </a:t>
             </a:r>
             <a:r>
               <a:rPr lang="en-US" sz="1800" b="0" dirty="0" err="1">
@@ -4015,7 +4322,7 @@
           <p:cNvPr id="6" name="Picture 5" descr="A screenshot of a computer&#10;&#10;Description automatically generated">
             <a:extLst>
               <a:ext uri="{FF2B5EF4-FFF2-40B4-BE49-F238E27FC236}">
-                <a16:creationId xmlns:a16="http://schemas.microsoft.com/office/drawing/2014/main" id="{B9595535-B7FA-5C11-BD16-924F93F1E43D}"/>
+                <a16:creationId xmlns:a16="http://schemas.microsoft.com/office/drawing/2014/main" id="{AF5BDEE8-A491-3676-80F7-2F4E2A8B4497}"/>
               </a:ext>
             </a:extLst>
           </p:cNvPr>
@@ -4043,7 +4350,7 @@
     </p:spTree>
     <p:extLst>
       <p:ext uri="{BB962C8B-B14F-4D97-AF65-F5344CB8AC3E}">
-        <p14:creationId xmlns:p14="http://schemas.microsoft.com/office/powerpoint/2010/main" val="3589307946"/>
+        <p14:creationId xmlns:p14="http://schemas.microsoft.com/office/powerpoint/2010/main" val="3442817501"/>
       </p:ext>
     </p:extLst>
   </p:cSld>
@@ -4053,7 +4360,7 @@
 </p:sld>
 </file>
 
-<file path=ppt/slides/slide12.xml><?xml version="1.0" encoding="utf-8"?>
+<file path=ppt/slides/slide13.xml><?xml version="1.0" encoding="utf-8"?>
 <p:sld xmlns:a="http://schemas.openxmlformats.org/drawingml/2006/main" xmlns:r="http://schemas.openxmlformats.org/officeDocument/2006/relationships" xmlns:p="http://schemas.openxmlformats.org/presentationml/2006/main">
   <p:cSld>
     <p:spTree>
@@ -4117,7 +4424,7 @@
         <p:spPr/>
         <p:txBody>
           <a:bodyPr>
-            <a:normAutofit lnSpcReduction="10000"/>
+            <a:normAutofit/>
           </a:bodyPr>
           <a:lstStyle/>
           <a:p>
@@ -4144,40 +4451,7 @@
             </a:pPr>
             <a:r>
               <a:rPr lang="en-US" sz="2400" dirty="0"/>
-              <a:t>All of the tables in the </a:t>
-            </a:r>
-            <a:r>
-              <a:rPr lang="en-US" sz="2400" dirty="0" err="1"/>
-              <a:t>training_dataset</a:t>
-            </a:r>
-            <a:r>
-              <a:rPr lang="en-US" sz="2400" dirty="0"/>
-              <a:t> have </a:t>
-            </a:r>
-            <a:r>
-              <a:rPr lang="en-US" sz="2400" dirty="0" err="1"/>
-              <a:t>patient_id</a:t>
-            </a:r>
-            <a:r>
-              <a:rPr lang="en-US" sz="2400" dirty="0"/>
-              <a:t> as a key.</a:t>
-            </a:r>
-          </a:p>
-          <a:p>
-            <a:pPr marL="0" indent="0">
-              <a:buNone/>
-            </a:pPr>
-            <a:r>
-              <a:rPr lang="en-US" sz="2400" dirty="0"/>
-              <a:t>In </a:t>
-            </a:r>
-            <a:r>
-              <a:rPr lang="en-US" sz="2400" dirty="0" err="1"/>
-              <a:t>DIM_Patient</a:t>
-            </a:r>
-            <a:r>
-              <a:rPr lang="en-US" sz="2400" dirty="0"/>
-              <a:t> it is the primary key and in the other tables foreign key. </a:t>
+              <a:t>All of the tables in the database have ID as a key.</a:t>
             </a:r>
           </a:p>
           <a:p>
@@ -4210,7 +4484,7 @@
 </p:sld>
 </file>
 
-<file path=ppt/slides/slide13.xml><?xml version="1.0" encoding="utf-8"?>
+<file path=ppt/slides/slide14.xml><?xml version="1.0" encoding="utf-8"?>
 <p:sld xmlns:a="http://schemas.openxmlformats.org/drawingml/2006/main" xmlns:r="http://schemas.openxmlformats.org/officeDocument/2006/relationships" xmlns:p="http://schemas.openxmlformats.org/presentationml/2006/main">
   <p:cSld>
     <p:spTree>
@@ -4578,257 +4852,6 @@
 </p:sld>
 </file>
 
-<file path=ppt/slides/slide14.xml><?xml version="1.0" encoding="utf-8"?>
-<p:sld xmlns:a="http://schemas.openxmlformats.org/drawingml/2006/main" xmlns:r="http://schemas.openxmlformats.org/officeDocument/2006/relationships" xmlns:p="http://schemas.openxmlformats.org/presentationml/2006/main">
-  <p:cSld>
-    <p:spTree>
-      <p:nvGrpSpPr>
-        <p:cNvPr id="1" name=""/>
-        <p:cNvGrpSpPr/>
-        <p:nvPr/>
-      </p:nvGrpSpPr>
-      <p:grpSpPr>
-        <a:xfrm>
-          <a:off x="0" y="0"/>
-          <a:ext cx="0" cy="0"/>
-          <a:chOff x="0" y="0"/>
-          <a:chExt cx="0" cy="0"/>
-        </a:xfrm>
-      </p:grpSpPr>
-      <p:sp>
-        <p:nvSpPr>
-          <p:cNvPr id="2" name="Title 1">
-            <a:extLst>
-              <a:ext uri="{FF2B5EF4-FFF2-40B4-BE49-F238E27FC236}">
-                <a16:creationId xmlns:a16="http://schemas.microsoft.com/office/drawing/2014/main" id="{06837521-A3F9-EC32-8E32-1B36C2835B17}"/>
-              </a:ext>
-            </a:extLst>
-          </p:cNvPr>
-          <p:cNvSpPr>
-            <a:spLocks noGrp="1"/>
-          </p:cNvSpPr>
-          <p:nvPr>
-            <p:ph type="title"/>
-          </p:nvPr>
-        </p:nvSpPr>
-        <p:spPr/>
-        <p:txBody>
-          <a:bodyPr/>
-          <a:lstStyle/>
-          <a:p>
-            <a:r>
-              <a:rPr lang="en-US" dirty="0"/>
-              <a:t>Multiple Joins</a:t>
-            </a:r>
-          </a:p>
-        </p:txBody>
-      </p:sp>
-      <p:sp>
-        <p:nvSpPr>
-          <p:cNvPr id="3" name="Content Placeholder 2">
-            <a:extLst>
-              <a:ext uri="{FF2B5EF4-FFF2-40B4-BE49-F238E27FC236}">
-                <a16:creationId xmlns:a16="http://schemas.microsoft.com/office/drawing/2014/main" id="{26D8B96C-7D36-5351-B25F-2592C631F653}"/>
-              </a:ext>
-            </a:extLst>
-          </p:cNvPr>
-          <p:cNvSpPr>
-            <a:spLocks noGrp="1"/>
-          </p:cNvSpPr>
-          <p:nvPr>
-            <p:ph idx="1"/>
-          </p:nvPr>
-        </p:nvSpPr>
-        <p:spPr/>
-        <p:txBody>
-          <a:bodyPr>
-            <a:normAutofit/>
-          </a:bodyPr>
-          <a:lstStyle/>
-          <a:p>
-            <a:pPr marL="0" indent="0">
-              <a:buNone/>
-            </a:pPr>
-            <a:r>
-              <a:rPr lang="en-US" sz="2400" dirty="0"/>
-              <a:t>SELECT </a:t>
-            </a:r>
-            <a:r>
-              <a:rPr lang="en-US" sz="2400" dirty="0" err="1"/>
-              <a:t>c.id</a:t>
-            </a:r>
-            <a:r>
-              <a:rPr lang="en-US" sz="2400" dirty="0"/>
-              <a:t>, </a:t>
-            </a:r>
-            <a:r>
-              <a:rPr lang="en-US" sz="2400" dirty="0" err="1"/>
-              <a:t>c.lastName</a:t>
-            </a:r>
-            <a:r>
-              <a:rPr lang="en-US" sz="2400" dirty="0"/>
-              <a:t>, </a:t>
-            </a:r>
-            <a:r>
-              <a:rPr lang="en-US" sz="2400" dirty="0" err="1"/>
-              <a:t>c.firstName</a:t>
-            </a:r>
-            <a:r>
-              <a:rPr lang="en-US" sz="2400" dirty="0"/>
-              <a:t>, </a:t>
-            </a:r>
-            <a:r>
-              <a:rPr lang="en-US" sz="2400" dirty="0" err="1"/>
-              <a:t>o.datePlaced</a:t>
-            </a:r>
-            <a:r>
-              <a:rPr lang="en-US" sz="2400" dirty="0"/>
-              <a:t>, </a:t>
-            </a:r>
-            <a:r>
-              <a:rPr lang="en-US" sz="2400" dirty="0" err="1"/>
-              <a:t>o.id</a:t>
-            </a:r>
-            <a:r>
-              <a:rPr lang="en-US" sz="2400" dirty="0"/>
-              <a:t> AS </a:t>
-            </a:r>
-            <a:r>
-              <a:rPr lang="en-US" sz="2400" dirty="0" err="1"/>
-              <a:t>orderId</a:t>
-            </a:r>
-            <a:r>
-              <a:rPr lang="en-US" sz="2400" dirty="0"/>
-              <a:t>, </a:t>
-            </a:r>
-            <a:r>
-              <a:rPr lang="en-US" sz="2400" dirty="0" err="1"/>
-              <a:t>ol.productId,p.name</a:t>
-            </a:r>
-            <a:r>
-              <a:rPr lang="en-US" sz="2400" dirty="0"/>
-              <a:t> AS </a:t>
-            </a:r>
-            <a:r>
-              <a:rPr lang="en-US" sz="2400" dirty="0" err="1"/>
-              <a:t>productName</a:t>
-            </a:r>
-            <a:r>
-              <a:rPr lang="en-US" sz="2400" dirty="0"/>
-              <a:t>, </a:t>
-            </a:r>
-            <a:r>
-              <a:rPr lang="en-US" sz="2400" dirty="0" err="1"/>
-              <a:t>p.currentPrice,ol.quantity</a:t>
-            </a:r>
-            <a:endParaRPr lang="en-US" sz="2400" dirty="0"/>
-          </a:p>
-          <a:p>
-            <a:pPr marL="0" indent="0">
-              <a:buNone/>
-            </a:pPr>
-            <a:r>
-              <a:rPr lang="en-US" sz="2400" dirty="0"/>
-              <a:t>FROM customer c </a:t>
-            </a:r>
-          </a:p>
-          <a:p>
-            <a:pPr marL="0" indent="0">
-              <a:buNone/>
-            </a:pPr>
-            <a:r>
-              <a:rPr lang="en-US" sz="2400" dirty="0"/>
-              <a:t>JOIN `order` o ON </a:t>
-            </a:r>
-            <a:r>
-              <a:rPr lang="en-US" sz="2400" dirty="0" err="1"/>
-              <a:t>c.id</a:t>
-            </a:r>
-            <a:r>
-              <a:rPr lang="en-US" sz="2400" dirty="0"/>
-              <a:t> = </a:t>
-            </a:r>
-            <a:r>
-              <a:rPr lang="en-US" sz="2400" dirty="0" err="1"/>
-              <a:t>o.customerID</a:t>
-            </a:r>
-            <a:endParaRPr lang="en-US" sz="2400" dirty="0"/>
-          </a:p>
-          <a:p>
-            <a:pPr marL="0" indent="0">
-              <a:buNone/>
-            </a:pPr>
-            <a:r>
-              <a:rPr lang="en-US" sz="2400" dirty="0"/>
-              <a:t>JOIN </a:t>
-            </a:r>
-            <a:r>
-              <a:rPr lang="en-US" sz="2400" dirty="0" err="1"/>
-              <a:t>orderLine</a:t>
-            </a:r>
-            <a:r>
-              <a:rPr lang="en-US" sz="2400" dirty="0"/>
-              <a:t> </a:t>
-            </a:r>
-            <a:r>
-              <a:rPr lang="en-US" sz="2400" dirty="0" err="1"/>
-              <a:t>ol</a:t>
-            </a:r>
-            <a:r>
-              <a:rPr lang="en-US" sz="2400" dirty="0"/>
-              <a:t> ON </a:t>
-            </a:r>
-            <a:r>
-              <a:rPr lang="en-US" sz="2400" dirty="0" err="1"/>
-              <a:t>o.id</a:t>
-            </a:r>
-            <a:r>
-              <a:rPr lang="en-US" sz="2400" dirty="0"/>
-              <a:t> = </a:t>
-            </a:r>
-            <a:r>
-              <a:rPr lang="en-US" sz="2400" dirty="0" err="1"/>
-              <a:t>ol.orderId</a:t>
-            </a:r>
-            <a:endParaRPr lang="en-US" sz="2400" dirty="0"/>
-          </a:p>
-          <a:p>
-            <a:pPr marL="0" indent="0">
-              <a:buNone/>
-            </a:pPr>
-            <a:r>
-              <a:rPr lang="en-US" sz="2400" dirty="0"/>
-              <a:t>JOIN product p ON </a:t>
-            </a:r>
-            <a:r>
-              <a:rPr lang="en-US" sz="2400" dirty="0" err="1"/>
-              <a:t>ol.productId</a:t>
-            </a:r>
-            <a:r>
-              <a:rPr lang="en-US" sz="2400" dirty="0"/>
-              <a:t>=</a:t>
-            </a:r>
-            <a:r>
-              <a:rPr lang="en-US" sz="2400" dirty="0" err="1"/>
-              <a:t>p.id</a:t>
-            </a:r>
-            <a:endParaRPr lang="en-US" sz="2400" dirty="0"/>
-          </a:p>
-        </p:txBody>
-      </p:sp>
-    </p:spTree>
-    <p:extLst>
-      <p:ext uri="{BB962C8B-B14F-4D97-AF65-F5344CB8AC3E}">
-        <p14:creationId xmlns:p14="http://schemas.microsoft.com/office/powerpoint/2010/main" val="891311210"/>
-      </p:ext>
-    </p:extLst>
-  </p:cSld>
-  <p:clrMapOvr>
-    <a:masterClrMapping/>
-  </p:clrMapOvr>
-</p:sld>
-</file>
-
 <file path=ppt/slides/slide15.xml><?xml version="1.0" encoding="utf-8"?>
 <p:sld xmlns:a="http://schemas.openxmlformats.org/drawingml/2006/main" xmlns:r="http://schemas.openxmlformats.org/officeDocument/2006/relationships" xmlns:p="http://schemas.openxmlformats.org/presentationml/2006/main">
   <p:cSld>
@@ -4851,7 +4874,7 @@
           <p:cNvPr id="2" name="Title 1">
             <a:extLst>
               <a:ext uri="{FF2B5EF4-FFF2-40B4-BE49-F238E27FC236}">
-                <a16:creationId xmlns:a16="http://schemas.microsoft.com/office/drawing/2014/main" id="{7CA4A622-D9C9-F7B5-7EC2-1F91B12F450B}"/>
+                <a16:creationId xmlns:a16="http://schemas.microsoft.com/office/drawing/2014/main" id="{06837521-A3F9-EC32-8E32-1B36C2835B17}"/>
               </a:ext>
             </a:extLst>
           </p:cNvPr>
@@ -4869,7 +4892,7 @@
           <a:p>
             <a:r>
               <a:rPr lang="en-US" dirty="0"/>
-              <a:t>LEFT JOIN</a:t>
+              <a:t>Multiple Joins</a:t>
             </a:r>
           </a:p>
         </p:txBody>
@@ -4879,7 +4902,7 @@
           <p:cNvPr id="3" name="Content Placeholder 2">
             <a:extLst>
               <a:ext uri="{FF2B5EF4-FFF2-40B4-BE49-F238E27FC236}">
-                <a16:creationId xmlns:a16="http://schemas.microsoft.com/office/drawing/2014/main" id="{690A84D7-D7F8-16EC-EB73-701D560A230B}"/>
+                <a16:creationId xmlns:a16="http://schemas.microsoft.com/office/drawing/2014/main" id="{26D8B96C-7D36-5351-B25F-2592C631F653}"/>
               </a:ext>
             </a:extLst>
           </p:cNvPr>
@@ -4901,6 +4924,265 @@
               <a:buNone/>
             </a:pPr>
             <a:r>
+              <a:rPr lang="en-US" sz="2400" dirty="0"/>
+              <a:t>SELECT </a:t>
+            </a:r>
+            <a:r>
+              <a:rPr lang="en-US" sz="2400" dirty="0" err="1"/>
+              <a:t>c.id</a:t>
+            </a:r>
+            <a:r>
+              <a:rPr lang="en-US" sz="2400" dirty="0"/>
+              <a:t> AS </a:t>
+            </a:r>
+            <a:r>
+              <a:rPr lang="en-US" sz="2400" dirty="0" err="1"/>
+              <a:t>CustomerId</a:t>
+            </a:r>
+            <a:r>
+              <a:rPr lang="en-US" sz="2400" dirty="0"/>
+              <a:t>, </a:t>
+            </a:r>
+            <a:r>
+              <a:rPr lang="en-US" sz="2400" dirty="0" err="1"/>
+              <a:t>c.lastName</a:t>
+            </a:r>
+            <a:r>
+              <a:rPr lang="en-US" sz="2400" dirty="0"/>
+              <a:t>, </a:t>
+            </a:r>
+            <a:r>
+              <a:rPr lang="en-US" sz="2400" dirty="0" err="1"/>
+              <a:t>c.firstName</a:t>
+            </a:r>
+            <a:r>
+              <a:rPr lang="en-US" sz="2400" dirty="0"/>
+              <a:t>, </a:t>
+            </a:r>
+            <a:r>
+              <a:rPr lang="en-US" sz="2400" dirty="0" err="1"/>
+              <a:t>o.datePlaced</a:t>
+            </a:r>
+            <a:r>
+              <a:rPr lang="en-US" sz="2400" dirty="0"/>
+              <a:t>, </a:t>
+            </a:r>
+            <a:r>
+              <a:rPr lang="en-US" sz="2400" dirty="0" err="1"/>
+              <a:t>o.id</a:t>
+            </a:r>
+            <a:r>
+              <a:rPr lang="en-US" sz="2400" dirty="0"/>
+              <a:t> AS </a:t>
+            </a:r>
+            <a:r>
+              <a:rPr lang="en-US" sz="2400" dirty="0" err="1"/>
+              <a:t>orderId</a:t>
+            </a:r>
+            <a:r>
+              <a:rPr lang="en-US" sz="2400" dirty="0"/>
+              <a:t>, </a:t>
+            </a:r>
+            <a:r>
+              <a:rPr lang="en-US" sz="2400" dirty="0" err="1"/>
+              <a:t>ol.productId,p.name</a:t>
+            </a:r>
+            <a:r>
+              <a:rPr lang="en-US" sz="2400" dirty="0"/>
+              <a:t> AS </a:t>
+            </a:r>
+            <a:r>
+              <a:rPr lang="en-US" sz="2400" dirty="0" err="1"/>
+              <a:t>productName</a:t>
+            </a:r>
+            <a:r>
+              <a:rPr lang="en-US" sz="2400" dirty="0"/>
+              <a:t>, </a:t>
+            </a:r>
+            <a:r>
+              <a:rPr lang="en-US" sz="2400" dirty="0" err="1"/>
+              <a:t>p.currentPrice,ol.quantity</a:t>
+            </a:r>
+            <a:endParaRPr lang="en-US" sz="2400" dirty="0"/>
+          </a:p>
+          <a:p>
+            <a:pPr marL="0" indent="0">
+              <a:buNone/>
+            </a:pPr>
+            <a:r>
+              <a:rPr lang="en-US" sz="2400" dirty="0"/>
+              <a:t>FROM customer c </a:t>
+            </a:r>
+          </a:p>
+          <a:p>
+            <a:pPr marL="0" indent="0">
+              <a:buNone/>
+            </a:pPr>
+            <a:r>
+              <a:rPr lang="en-US" sz="2400" dirty="0"/>
+              <a:t>JOIN orders o ON </a:t>
+            </a:r>
+            <a:r>
+              <a:rPr lang="en-US" sz="2400" dirty="0" err="1"/>
+              <a:t>c.id</a:t>
+            </a:r>
+            <a:r>
+              <a:rPr lang="en-US" sz="2400" dirty="0"/>
+              <a:t> = </a:t>
+            </a:r>
+            <a:r>
+              <a:rPr lang="en-US" sz="2400" dirty="0" err="1"/>
+              <a:t>o.customerID</a:t>
+            </a:r>
+            <a:endParaRPr lang="en-US" sz="2400" dirty="0"/>
+          </a:p>
+          <a:p>
+            <a:pPr marL="0" indent="0">
+              <a:buNone/>
+            </a:pPr>
+            <a:r>
+              <a:rPr lang="en-US" sz="2400" dirty="0"/>
+              <a:t>JOIN </a:t>
+            </a:r>
+            <a:r>
+              <a:rPr lang="en-US" sz="2400" dirty="0" err="1"/>
+              <a:t>orderLine</a:t>
+            </a:r>
+            <a:r>
+              <a:rPr lang="en-US" sz="2400" dirty="0"/>
+              <a:t> </a:t>
+            </a:r>
+            <a:r>
+              <a:rPr lang="en-US" sz="2400" dirty="0" err="1"/>
+              <a:t>ol</a:t>
+            </a:r>
+            <a:r>
+              <a:rPr lang="en-US" sz="2400" dirty="0"/>
+              <a:t> ON </a:t>
+            </a:r>
+            <a:r>
+              <a:rPr lang="en-US" sz="2400" dirty="0" err="1"/>
+              <a:t>o.id</a:t>
+            </a:r>
+            <a:r>
+              <a:rPr lang="en-US" sz="2400" dirty="0"/>
+              <a:t> = </a:t>
+            </a:r>
+            <a:r>
+              <a:rPr lang="en-US" sz="2400" dirty="0" err="1"/>
+              <a:t>ol.orderId</a:t>
+            </a:r>
+            <a:endParaRPr lang="en-US" sz="2400" dirty="0"/>
+          </a:p>
+          <a:p>
+            <a:pPr marL="0" indent="0">
+              <a:buNone/>
+            </a:pPr>
+            <a:r>
+              <a:rPr lang="en-US" sz="2400" dirty="0"/>
+              <a:t>JOIN product p ON </a:t>
+            </a:r>
+            <a:r>
+              <a:rPr lang="en-US" sz="2400" dirty="0" err="1"/>
+              <a:t>ol.productId</a:t>
+            </a:r>
+            <a:r>
+              <a:rPr lang="en-US" sz="2400" dirty="0"/>
+              <a:t>=</a:t>
+            </a:r>
+            <a:r>
+              <a:rPr lang="en-US" sz="2400" dirty="0" err="1"/>
+              <a:t>p.id</a:t>
+            </a:r>
+            <a:endParaRPr lang="en-US" sz="2400" dirty="0"/>
+          </a:p>
+        </p:txBody>
+      </p:sp>
+    </p:spTree>
+    <p:extLst>
+      <p:ext uri="{BB962C8B-B14F-4D97-AF65-F5344CB8AC3E}">
+        <p14:creationId xmlns:p14="http://schemas.microsoft.com/office/powerpoint/2010/main" val="891311210"/>
+      </p:ext>
+    </p:extLst>
+  </p:cSld>
+  <p:clrMapOvr>
+    <a:masterClrMapping/>
+  </p:clrMapOvr>
+</p:sld>
+</file>
+
+<file path=ppt/slides/slide16.xml><?xml version="1.0" encoding="utf-8"?>
+<p:sld xmlns:a="http://schemas.openxmlformats.org/drawingml/2006/main" xmlns:r="http://schemas.openxmlformats.org/officeDocument/2006/relationships" xmlns:p="http://schemas.openxmlformats.org/presentationml/2006/main">
+  <p:cSld>
+    <p:spTree>
+      <p:nvGrpSpPr>
+        <p:cNvPr id="1" name=""/>
+        <p:cNvGrpSpPr/>
+        <p:nvPr/>
+      </p:nvGrpSpPr>
+      <p:grpSpPr>
+        <a:xfrm>
+          <a:off x="0" y="0"/>
+          <a:ext cx="0" cy="0"/>
+          <a:chOff x="0" y="0"/>
+          <a:chExt cx="0" cy="0"/>
+        </a:xfrm>
+      </p:grpSpPr>
+      <p:sp>
+        <p:nvSpPr>
+          <p:cNvPr id="2" name="Title 1">
+            <a:extLst>
+              <a:ext uri="{FF2B5EF4-FFF2-40B4-BE49-F238E27FC236}">
+                <a16:creationId xmlns:a16="http://schemas.microsoft.com/office/drawing/2014/main" id="{7CA4A622-D9C9-F7B5-7EC2-1F91B12F450B}"/>
+              </a:ext>
+            </a:extLst>
+          </p:cNvPr>
+          <p:cNvSpPr>
+            <a:spLocks noGrp="1"/>
+          </p:cNvSpPr>
+          <p:nvPr>
+            <p:ph type="title"/>
+          </p:nvPr>
+        </p:nvSpPr>
+        <p:spPr/>
+        <p:txBody>
+          <a:bodyPr/>
+          <a:lstStyle/>
+          <a:p>
+            <a:r>
+              <a:rPr lang="en-US" dirty="0"/>
+              <a:t>LEFT JOIN</a:t>
+            </a:r>
+          </a:p>
+        </p:txBody>
+      </p:sp>
+      <p:sp>
+        <p:nvSpPr>
+          <p:cNvPr id="3" name="Content Placeholder 2">
+            <a:extLst>
+              <a:ext uri="{FF2B5EF4-FFF2-40B4-BE49-F238E27FC236}">
+                <a16:creationId xmlns:a16="http://schemas.microsoft.com/office/drawing/2014/main" id="{690A84D7-D7F8-16EC-EB73-701D560A230B}"/>
+              </a:ext>
+            </a:extLst>
+          </p:cNvPr>
+          <p:cNvSpPr>
+            <a:spLocks noGrp="1"/>
+          </p:cNvSpPr>
+          <p:nvPr>
+            <p:ph idx="1"/>
+          </p:nvPr>
+        </p:nvSpPr>
+        <p:spPr/>
+        <p:txBody>
+          <a:bodyPr>
+            <a:normAutofit/>
+          </a:bodyPr>
+          <a:lstStyle/>
+          <a:p>
+            <a:pPr marL="0" indent="0">
+              <a:buNone/>
+            </a:pPr>
+            <a:r>
               <a:rPr lang="en-US" sz="2300" b="0" dirty="0">
                 <a:solidFill>
                   <a:srgbClr val="3367D6"/>
@@ -5025,7 +5307,7 @@
                 </a:highlight>
                 <a:latin typeface="Roboto Mono" pitchFamily="49" charset="0"/>
               </a:rPr>
-              <a:t>LEFT JOIN `order` o ON c.id = </a:t>
+              <a:t>LEFT JOIN orders o ON c.id = </a:t>
             </a:r>
             <a:r>
               <a:rPr lang="en-US" sz="2300" b="0" dirty="0" err="1">
@@ -5142,7 +5424,7 @@
 </p:sld>
 </file>
 
-<file path=ppt/slides/slide16.xml><?xml version="1.0" encoding="utf-8"?>
+<file path=ppt/slides/slide17.xml><?xml version="1.0" encoding="utf-8"?>
 <p:sld xmlns:a="http://schemas.openxmlformats.org/drawingml/2006/main" xmlns:r="http://schemas.openxmlformats.org/officeDocument/2006/relationships" xmlns:p="http://schemas.openxmlformats.org/presentationml/2006/main">
   <p:cSld>
     <p:spTree>
@@ -5491,7 +5773,7 @@
 </p:sld>
 </file>
 
-<file path=ppt/slides/slide17.xml><?xml version="1.0" encoding="utf-8"?>
+<file path=ppt/slides/slide18.xml><?xml version="1.0" encoding="utf-8"?>
 <p:sld xmlns:a="http://schemas.openxmlformats.org/drawingml/2006/main" xmlns:r="http://schemas.openxmlformats.org/officeDocument/2006/relationships" xmlns:p="http://schemas.openxmlformats.org/presentationml/2006/main">
   <p:cSld>
     <p:spTree>
@@ -5854,7 +6136,7 @@
 </p:sld>
 </file>
 
-<file path=ppt/slides/slide18.xml><?xml version="1.0" encoding="utf-8"?>
+<file path=ppt/slides/slide19.xml><?xml version="1.0" encoding="utf-8"?>
 <p:sld xmlns:a="http://schemas.openxmlformats.org/drawingml/2006/main" xmlns:r="http://schemas.openxmlformats.org/officeDocument/2006/relationships" xmlns:p="http://schemas.openxmlformats.org/presentationml/2006/main">
   <p:cSld>
     <p:spTree>
@@ -6047,7 +6329,7 @@
                 </a:highlight>
                 <a:latin typeface="Roboto Mono" pitchFamily="49" charset="0"/>
               </a:rPr>
-              <a:t>JOIN `order` o ON </a:t>
+              <a:t>JOIN orders o ON </a:t>
             </a:r>
             <a:r>
               <a:rPr lang="en-US" sz="1900" b="0" dirty="0" err="1">
@@ -6236,180 +6518,6 @@
 </p:sld>
 </file>
 
-<file path=ppt/slides/slide19.xml><?xml version="1.0" encoding="utf-8"?>
-<p:sld xmlns:a="http://schemas.openxmlformats.org/drawingml/2006/main" xmlns:r="http://schemas.openxmlformats.org/officeDocument/2006/relationships" xmlns:p="http://schemas.openxmlformats.org/presentationml/2006/main">
-  <p:cSld>
-    <p:spTree>
-      <p:nvGrpSpPr>
-        <p:cNvPr id="1" name=""/>
-        <p:cNvGrpSpPr/>
-        <p:nvPr/>
-      </p:nvGrpSpPr>
-      <p:grpSpPr>
-        <a:xfrm>
-          <a:off x="0" y="0"/>
-          <a:ext cx="0" cy="0"/>
-          <a:chOff x="0" y="0"/>
-          <a:chExt cx="0" cy="0"/>
-        </a:xfrm>
-      </p:grpSpPr>
-      <p:sp>
-        <p:nvSpPr>
-          <p:cNvPr id="2" name="Title 1">
-            <a:extLst>
-              <a:ext uri="{FF2B5EF4-FFF2-40B4-BE49-F238E27FC236}">
-                <a16:creationId xmlns:a16="http://schemas.microsoft.com/office/drawing/2014/main" id="{5A79FD0C-1C00-93F0-A57B-569DC7E4282C}"/>
-              </a:ext>
-            </a:extLst>
-          </p:cNvPr>
-          <p:cNvSpPr>
-            <a:spLocks noGrp="1"/>
-          </p:cNvSpPr>
-          <p:nvPr>
-            <p:ph type="title"/>
-          </p:nvPr>
-        </p:nvSpPr>
-        <p:spPr/>
-        <p:txBody>
-          <a:bodyPr/>
-          <a:lstStyle/>
-          <a:p>
-            <a:r>
-              <a:rPr lang="en-US" sz="4400" kern="100" dirty="0">
-                <a:effectLst/>
-                <a:latin typeface="Aptos" panose="020B0004020202020204" pitchFamily="34" charset="0"/>
-                <a:ea typeface="Aptos" panose="020B0004020202020204" pitchFamily="34" charset="0"/>
-                <a:cs typeface="Times New Roman" panose="02020603050405020304" pitchFamily="18" charset="0"/>
-              </a:rPr>
-              <a:t>SELF JOIN</a:t>
-            </a:r>
-            <a:endParaRPr lang="en-US" dirty="0"/>
-          </a:p>
-        </p:txBody>
-      </p:sp>
-      <p:sp>
-        <p:nvSpPr>
-          <p:cNvPr id="3" name="Content Placeholder 2">
-            <a:extLst>
-              <a:ext uri="{FF2B5EF4-FFF2-40B4-BE49-F238E27FC236}">
-                <a16:creationId xmlns:a16="http://schemas.microsoft.com/office/drawing/2014/main" id="{20E3E195-E716-9566-F681-3F630822ED2E}"/>
-              </a:ext>
-            </a:extLst>
-          </p:cNvPr>
-          <p:cNvSpPr>
-            <a:spLocks noGrp="1"/>
-          </p:cNvSpPr>
-          <p:nvPr>
-            <p:ph idx="1"/>
-          </p:nvPr>
-        </p:nvSpPr>
-        <p:spPr/>
-        <p:txBody>
-          <a:bodyPr>
-            <a:normAutofit/>
-          </a:bodyPr>
-          <a:lstStyle/>
-          <a:p>
-            <a:pPr marL="0" marR="0" indent="0">
-              <a:spcBef>
-                <a:spcPts val="0"/>
-              </a:spcBef>
-              <a:spcAft>
-                <a:spcPts val="0"/>
-              </a:spcAft>
-              <a:buNone/>
-            </a:pPr>
-            <a:r>
-              <a:rPr lang="en-US" sz="2400" kern="100" dirty="0" err="1">
-                <a:effectLst/>
-                <a:latin typeface="Aptos" panose="020B0004020202020204" pitchFamily="34" charset="0"/>
-                <a:ea typeface="Aptos" panose="020B0004020202020204" pitchFamily="34" charset="0"/>
-                <a:cs typeface="Times New Roman" panose="02020603050405020304" pitchFamily="18" charset="0"/>
-              </a:rPr>
-              <a:t>JOINing</a:t>
-            </a:r>
-            <a:r>
-              <a:rPr lang="en-US" sz="2400" kern="100" dirty="0">
-                <a:effectLst/>
-                <a:latin typeface="Aptos" panose="020B0004020202020204" pitchFamily="34" charset="0"/>
-                <a:ea typeface="Aptos" panose="020B0004020202020204" pitchFamily="34" charset="0"/>
-                <a:cs typeface="Times New Roman" panose="02020603050405020304" pitchFamily="18" charset="0"/>
-              </a:rPr>
-              <a:t> a. table to itself.</a:t>
-            </a:r>
-          </a:p>
-          <a:p>
-            <a:pPr marL="0" indent="0">
-              <a:buNone/>
-            </a:pPr>
-            <a:endParaRPr lang="en-US" sz="2400" dirty="0"/>
-          </a:p>
-          <a:p>
-            <a:pPr marL="0" indent="0">
-              <a:buNone/>
-            </a:pPr>
-            <a:r>
-              <a:rPr lang="en-US" sz="2400" dirty="0"/>
-              <a:t>Example: using employee table:</a:t>
-            </a:r>
-          </a:p>
-          <a:p>
-            <a:pPr marL="0" indent="0">
-              <a:buNone/>
-            </a:pPr>
-            <a:endParaRPr lang="en-US" sz="2400" dirty="0"/>
-          </a:p>
-          <a:p>
-            <a:pPr marL="0" indent="0">
-              <a:buNone/>
-            </a:pPr>
-            <a:endParaRPr lang="en-US" sz="2400" dirty="0"/>
-          </a:p>
-        </p:txBody>
-      </p:sp>
-      <p:pic>
-        <p:nvPicPr>
-          <p:cNvPr id="5" name="Picture 4" descr="A screenshot of a table&#10;&#10;Description automatically generated">
-            <a:extLst>
-              <a:ext uri="{FF2B5EF4-FFF2-40B4-BE49-F238E27FC236}">
-                <a16:creationId xmlns:a16="http://schemas.microsoft.com/office/drawing/2014/main" id="{BD3B5CAE-D4F6-7420-7314-35CB421F0FF3}"/>
-              </a:ext>
-            </a:extLst>
-          </p:cNvPr>
-          <p:cNvPicPr>
-            <a:picLocks noChangeAspect="1"/>
-          </p:cNvPicPr>
-          <p:nvPr/>
-        </p:nvPicPr>
-        <p:blipFill>
-          <a:blip r:embed="rId2"/>
-          <a:stretch>
-            <a:fillRect/>
-          </a:stretch>
-        </p:blipFill>
-        <p:spPr>
-          <a:xfrm>
-            <a:off x="1901963" y="3333474"/>
-            <a:ext cx="5928638" cy="2063474"/>
-          </a:xfrm>
-          <a:prstGeom prst="rect">
-            <a:avLst/>
-          </a:prstGeom>
-        </p:spPr>
-      </p:pic>
-    </p:spTree>
-    <p:extLst>
-      <p:ext uri="{BB962C8B-B14F-4D97-AF65-F5344CB8AC3E}">
-        <p14:creationId xmlns:p14="http://schemas.microsoft.com/office/powerpoint/2010/main" val="3748167887"/>
-      </p:ext>
-    </p:extLst>
-  </p:cSld>
-  <p:clrMapOvr>
-    <a:masterClrMapping/>
-  </p:clrMapOvr>
-</p:sld>
-</file>
-
 <file path=ppt/slides/slide2.xml><?xml version="1.0" encoding="utf-8"?>
 <p:sld xmlns:a="http://schemas.openxmlformats.org/drawingml/2006/main" xmlns:r="http://schemas.openxmlformats.org/officeDocument/2006/relationships" xmlns:p="http://schemas.openxmlformats.org/presentationml/2006/main">
   <p:cSld>
@@ -6964,7 +7072,7 @@
           <p:cNvPr id="2" name="Title 1">
             <a:extLst>
               <a:ext uri="{FF2B5EF4-FFF2-40B4-BE49-F238E27FC236}">
-                <a16:creationId xmlns:a16="http://schemas.microsoft.com/office/drawing/2014/main" id="{9CCD3324-78D7-8EBE-D505-CD43346CB892}"/>
+                <a16:creationId xmlns:a16="http://schemas.microsoft.com/office/drawing/2014/main" id="{5A79FD0C-1C00-93F0-A57B-569DC7E4282C}"/>
               </a:ext>
             </a:extLst>
           </p:cNvPr>
@@ -6981,9 +7089,15 @@
           <a:lstStyle/>
           <a:p>
             <a:r>
-              <a:rPr lang="en-US" dirty="0"/>
-              <a:t>SELF JOIN example cont.</a:t>
-            </a:r>
+              <a:rPr lang="en-US" sz="4400" kern="100" dirty="0">
+                <a:effectLst/>
+                <a:latin typeface="Aptos" panose="020B0004020202020204" pitchFamily="34" charset="0"/>
+                <a:ea typeface="Aptos" panose="020B0004020202020204" pitchFamily="34" charset="0"/>
+                <a:cs typeface="Times New Roman" panose="02020603050405020304" pitchFamily="18" charset="0"/>
+              </a:rPr>
+              <a:t>SELF JOIN</a:t>
+            </a:r>
+            <a:endParaRPr lang="en-US" dirty="0"/>
           </a:p>
         </p:txBody>
       </p:sp>
@@ -6992,7 +7106,7 @@
           <p:cNvPr id="3" name="Content Placeholder 2">
             <a:extLst>
               <a:ext uri="{FF2B5EF4-FFF2-40B4-BE49-F238E27FC236}">
-                <a16:creationId xmlns:a16="http://schemas.microsoft.com/office/drawing/2014/main" id="{DE10B99D-FF5F-CE46-2C18-382E0E038A30}"/>
+                <a16:creationId xmlns:a16="http://schemas.microsoft.com/office/drawing/2014/main" id="{20E3E195-E716-9566-F681-3F630822ED2E}"/>
               </a:ext>
             </a:extLst>
           </p:cNvPr>
@@ -7010,163 +7124,69 @@
           </a:bodyPr>
           <a:lstStyle/>
           <a:p>
-            <a:pPr marL="0" indent="0">
-              <a:buNone/>
-            </a:pPr>
-            <a:r>
-              <a:rPr lang="en-US" sz="1800" dirty="0"/>
-              <a:t>SELECT </a:t>
-            </a:r>
-            <a:r>
-              <a:rPr lang="en-US" sz="1800" dirty="0" err="1"/>
-              <a:t>e.lastName</a:t>
-            </a:r>
-            <a:r>
-              <a:rPr lang="en-US" sz="1800" dirty="0"/>
-              <a:t>, </a:t>
-            </a:r>
-            <a:r>
-              <a:rPr lang="en-US" sz="1800" dirty="0" err="1"/>
-              <a:t>e.firstName</a:t>
-            </a:r>
-            <a:r>
-              <a:rPr lang="en-US" sz="1800" dirty="0"/>
-              <a:t>, </a:t>
-            </a:r>
-            <a:r>
-              <a:rPr lang="en-US" sz="1800" dirty="0" err="1"/>
-              <a:t>m.lastName</a:t>
-            </a:r>
-            <a:r>
-              <a:rPr lang="en-US" sz="1800" dirty="0"/>
-              <a:t> AS 'Manager Last Name', </a:t>
-            </a:r>
-            <a:r>
-              <a:rPr lang="en-US" sz="1800" dirty="0" err="1"/>
-              <a:t>m.firstName</a:t>
-            </a:r>
-            <a:r>
-              <a:rPr lang="en-US" sz="1800" dirty="0"/>
-              <a:t>  AS 'Manager First Name'</a:t>
-            </a:r>
-          </a:p>
-          <a:p>
-            <a:pPr marL="0" indent="0">
-              <a:buNone/>
-            </a:pPr>
-            <a:r>
-              <a:rPr lang="en-US" sz="1800" dirty="0"/>
-              <a:t>FROM employees e</a:t>
-            </a:r>
-          </a:p>
-          <a:p>
-            <a:pPr marL="0" indent="0">
-              <a:buNone/>
-            </a:pPr>
-            <a:r>
-              <a:rPr lang="en-US" sz="1800" dirty="0"/>
-              <a:t>JOIN employees m ON </a:t>
-            </a:r>
-            <a:r>
-              <a:rPr lang="en-US" sz="1800" dirty="0" err="1"/>
-              <a:t>e.managerId</a:t>
-            </a:r>
-            <a:r>
-              <a:rPr lang="en-US" sz="1800" dirty="0"/>
-              <a:t> = </a:t>
-            </a:r>
-            <a:r>
-              <a:rPr lang="en-US" sz="1800" dirty="0" err="1"/>
-              <a:t>m.employeeId</a:t>
-            </a:r>
-            <a:r>
-              <a:rPr lang="en-US" sz="1800" dirty="0"/>
-              <a:t>;</a:t>
-            </a:r>
-          </a:p>
-          <a:p>
-            <a:pPr marL="0" indent="0">
-              <a:buNone/>
-            </a:pPr>
-            <a:endParaRPr lang="en-US" sz="1800" dirty="0"/>
-          </a:p>
-          <a:p>
-            <a:pPr marL="0" indent="0">
-              <a:buNone/>
-            </a:pPr>
-            <a:endParaRPr lang="en-US" sz="1800" dirty="0"/>
-          </a:p>
-          <a:p>
-            <a:pPr marL="0" indent="0">
-              <a:buNone/>
-            </a:pPr>
-            <a:endParaRPr lang="en-US" sz="1800" dirty="0"/>
-          </a:p>
-          <a:p>
-            <a:pPr marL="0" indent="0">
-              <a:buNone/>
-            </a:pPr>
-            <a:endParaRPr lang="en-US" sz="1800" dirty="0"/>
-          </a:p>
-          <a:p>
-            <a:pPr marL="0" indent="0">
-              <a:buNone/>
-            </a:pPr>
-            <a:endParaRPr lang="en-US" sz="1800" dirty="0"/>
-          </a:p>
-          <a:p>
-            <a:pPr marL="0" indent="0">
-              <a:buNone/>
-            </a:pPr>
-            <a:endParaRPr lang="en-US" sz="1800" dirty="0"/>
-          </a:p>
-          <a:p>
-            <a:pPr marL="0" indent="0">
-              <a:buNone/>
-            </a:pPr>
-            <a:endParaRPr lang="en-US" sz="1800" dirty="0"/>
-          </a:p>
-          <a:p>
-            <a:pPr marL="0" indent="0">
-              <a:buNone/>
-            </a:pPr>
-            <a:r>
-              <a:rPr lang="en-US" sz="1800" dirty="0"/>
-              <a:t>Note when joining a table to itself you must use table aliases, i.e. employees </a:t>
-            </a:r>
-            <a:r>
-              <a:rPr lang="en-US" sz="1800" b="1" dirty="0"/>
-              <a:t>e</a:t>
-            </a:r>
-            <a:r>
-              <a:rPr lang="en-US" sz="1800" dirty="0"/>
-              <a:t> and employees </a:t>
-            </a:r>
-            <a:r>
-              <a:rPr lang="en-US" sz="1800" b="1" dirty="0"/>
-              <a:t>m</a:t>
-            </a:r>
-          </a:p>
-          <a:p>
-            <a:pPr marL="0" indent="0">
-              <a:buNone/>
-            </a:pPr>
-            <a:endParaRPr lang="en-US" sz="1800" dirty="0"/>
-          </a:p>
-          <a:p>
-            <a:pPr marL="0" indent="0">
-              <a:buNone/>
-            </a:pPr>
-            <a:endParaRPr lang="en-US" sz="1800" dirty="0"/>
+            <a:pPr marL="0" marR="0" indent="0">
+              <a:spcBef>
+                <a:spcPts val="0"/>
+              </a:spcBef>
+              <a:spcAft>
+                <a:spcPts val="0"/>
+              </a:spcAft>
+              <a:buNone/>
+            </a:pPr>
+            <a:r>
+              <a:rPr lang="en-US" sz="2400" kern="100" dirty="0" err="1">
+                <a:effectLst/>
+                <a:latin typeface="Aptos" panose="020B0004020202020204" pitchFamily="34" charset="0"/>
+                <a:ea typeface="Aptos" panose="020B0004020202020204" pitchFamily="34" charset="0"/>
+                <a:cs typeface="Times New Roman" panose="02020603050405020304" pitchFamily="18" charset="0"/>
+              </a:rPr>
+              <a:t>JOINing</a:t>
+            </a:r>
+            <a:r>
+              <a:rPr lang="en-US" sz="2400" kern="100" dirty="0">
+                <a:effectLst/>
+                <a:latin typeface="Aptos" panose="020B0004020202020204" pitchFamily="34" charset="0"/>
+                <a:ea typeface="Aptos" panose="020B0004020202020204" pitchFamily="34" charset="0"/>
+                <a:cs typeface="Times New Roman" panose="02020603050405020304" pitchFamily="18" charset="0"/>
+              </a:rPr>
+              <a:t> a. table to itself.</a:t>
+            </a:r>
+          </a:p>
+          <a:p>
+            <a:pPr marL="0" indent="0">
+              <a:buNone/>
+            </a:pPr>
+            <a:endParaRPr lang="en-US" sz="2400" dirty="0"/>
+          </a:p>
+          <a:p>
+            <a:pPr marL="0" indent="0">
+              <a:buNone/>
+            </a:pPr>
+            <a:r>
+              <a:rPr lang="en-US" sz="2400" dirty="0"/>
+              <a:t>Example: using employee table:</a:t>
+            </a:r>
+          </a:p>
+          <a:p>
+            <a:pPr marL="0" indent="0">
+              <a:buNone/>
+            </a:pPr>
+            <a:endParaRPr lang="en-US" sz="2400" dirty="0"/>
+          </a:p>
+          <a:p>
+            <a:pPr marL="0" indent="0">
+              <a:buNone/>
+            </a:pPr>
+            <a:endParaRPr lang="en-US" sz="2400" dirty="0"/>
           </a:p>
         </p:txBody>
       </p:sp>
       <p:pic>
         <p:nvPicPr>
-          <p:cNvPr id="6" name="Picture 5" descr="A screenshot of a phone&#10;&#10;Description automatically generated">
-            <a:extLst>
-              <a:ext uri="{FF2B5EF4-FFF2-40B4-BE49-F238E27FC236}">
-                <a16:creationId xmlns:a16="http://schemas.microsoft.com/office/drawing/2014/main" id="{E2370413-6C93-3A08-CF74-7FDF8E1EEE7E}"/>
+          <p:cNvPr id="6" name="Picture 5">
+            <a:extLst>
+              <a:ext uri="{FF2B5EF4-FFF2-40B4-BE49-F238E27FC236}">
+                <a16:creationId xmlns:a16="http://schemas.microsoft.com/office/drawing/2014/main" id="{DA4672B2-7893-E838-A7CB-E8583C3C2FAC}"/>
               </a:ext>
             </a:extLst>
           </p:cNvPr>
@@ -7183,8 +7203,8 @@
         </p:blipFill>
         <p:spPr>
           <a:xfrm>
-            <a:off x="1283902" y="3696302"/>
-            <a:ext cx="5983171" cy="1930616"/>
+            <a:off x="916615" y="3556140"/>
+            <a:ext cx="4611825" cy="1922846"/>
           </a:xfrm>
           <a:prstGeom prst="rect">
             <a:avLst/>
@@ -7194,7 +7214,7 @@
     </p:spTree>
     <p:extLst>
       <p:ext uri="{BB962C8B-B14F-4D97-AF65-F5344CB8AC3E}">
-        <p14:creationId xmlns:p14="http://schemas.microsoft.com/office/powerpoint/2010/main" val="2549032234"/>
+        <p14:creationId xmlns:p14="http://schemas.microsoft.com/office/powerpoint/2010/main" val="3748167887"/>
       </p:ext>
     </p:extLst>
   </p:cSld>
@@ -7226,7 +7246,7 @@
           <p:cNvPr id="2" name="Title 1">
             <a:extLst>
               <a:ext uri="{FF2B5EF4-FFF2-40B4-BE49-F238E27FC236}">
-                <a16:creationId xmlns:a16="http://schemas.microsoft.com/office/drawing/2014/main" id="{5A86A0F1-1AEB-7FC5-D33A-8CA65721468B}"/>
+                <a16:creationId xmlns:a16="http://schemas.microsoft.com/office/drawing/2014/main" id="{9CCD3324-78D7-8EBE-D505-CD43346CB892}"/>
               </a:ext>
             </a:extLst>
           </p:cNvPr>
@@ -7244,7 +7264,7 @@
           <a:p>
             <a:r>
               <a:rPr lang="en-US" dirty="0"/>
-              <a:t>FULL OUTER JOIN	</a:t>
+              <a:t>SELF JOIN example cont.</a:t>
             </a:r>
           </a:p>
         </p:txBody>
@@ -7254,7 +7274,7 @@
           <p:cNvPr id="3" name="Content Placeholder 2">
             <a:extLst>
               <a:ext uri="{FF2B5EF4-FFF2-40B4-BE49-F238E27FC236}">
-                <a16:creationId xmlns:a16="http://schemas.microsoft.com/office/drawing/2014/main" id="{3D5C31E2-5C49-0229-28C7-1BC2B4668A62}"/>
+                <a16:creationId xmlns:a16="http://schemas.microsoft.com/office/drawing/2014/main" id="{DE10B99D-FF5F-CE46-2C18-382E0E038A30}"/>
               </a:ext>
             </a:extLst>
           </p:cNvPr>
@@ -7268,7 +7288,7 @@
         <p:spPr/>
         <p:txBody>
           <a:bodyPr>
-            <a:normAutofit lnSpcReduction="10000"/>
+            <a:normAutofit/>
           </a:bodyPr>
           <a:lstStyle/>
           <a:p>
@@ -7276,133 +7296,187 @@
               <a:buNone/>
             </a:pPr>
             <a:r>
-              <a:rPr lang="en-US" sz="2400" dirty="0"/>
-              <a:t>A </a:t>
-            </a:r>
-            <a:r>
-              <a:rPr lang="en-US" sz="2400" b="1" dirty="0"/>
-              <a:t>full outer join</a:t>
-            </a:r>
-            <a:r>
-              <a:rPr lang="en-US" sz="2400" dirty="0"/>
-              <a:t> is a type of SQL join that combines the results of a </a:t>
-            </a:r>
-            <a:r>
-              <a:rPr lang="en-US" sz="2400" b="1" dirty="0"/>
-              <a:t>left join</a:t>
-            </a:r>
-            <a:r>
-              <a:rPr lang="en-US" sz="2400" dirty="0"/>
-              <a:t> and a </a:t>
-            </a:r>
-            <a:r>
-              <a:rPr lang="en-US" sz="2400" b="1" dirty="0"/>
-              <a:t>right join</a:t>
-            </a:r>
-            <a:r>
-              <a:rPr lang="en-US" sz="2400" dirty="0"/>
-              <a:t>. It returns all records from both tables, matching rows where there is a match between the two tables' keys and including NULLs where no match is found.</a:t>
-            </a:r>
-          </a:p>
-          <a:p>
-            <a:pPr marL="0" indent="0">
-              <a:buNone/>
-            </a:pPr>
-            <a:endParaRPr lang="en-US" sz="2400" dirty="0"/>
-          </a:p>
-          <a:p>
-            <a:pPr marL="0" indent="0">
-              <a:buNone/>
-            </a:pPr>
-            <a:r>
-              <a:rPr lang="en-US" sz="1900" b="1" u="sng" dirty="0"/>
-              <a:t>Key Points:</a:t>
-            </a:r>
-          </a:p>
-          <a:p>
-            <a:pPr>
-              <a:buFont typeface="+mj-lt"/>
-              <a:buAutoNum type="arabicPeriod"/>
-            </a:pPr>
-            <a:r>
-              <a:rPr lang="en-US" sz="1900" b="1" dirty="0"/>
-              <a:t>Matching Rows</a:t>
-            </a:r>
-            <a:r>
-              <a:rPr lang="en-US" sz="1900" dirty="0"/>
-              <a:t>: Where a match exists between the two tables, rows are combined.</a:t>
-            </a:r>
-          </a:p>
-          <a:p>
-            <a:pPr>
-              <a:buFont typeface="+mj-lt"/>
-              <a:buAutoNum type="arabicPeriod"/>
-            </a:pPr>
-            <a:r>
-              <a:rPr lang="en-US" sz="1900" b="1" dirty="0"/>
-              <a:t>Non-Matching Rows</a:t>
-            </a:r>
-            <a:r>
-              <a:rPr lang="en-US" sz="1900" dirty="0"/>
-              <a:t>: Rows with no match in either table are included in the result, with NULLs for the missing columns.</a:t>
-            </a:r>
-          </a:p>
-          <a:p>
-            <a:pPr>
-              <a:buFont typeface="+mj-lt"/>
-              <a:buAutoNum type="arabicPeriod"/>
-            </a:pPr>
-            <a:r>
-              <a:rPr lang="en-US" sz="1900" b="1" dirty="0"/>
-              <a:t>Result</a:t>
-            </a:r>
-            <a:r>
-              <a:rPr lang="en-US" sz="1900" dirty="0"/>
-              <a:t>: The result includes:</a:t>
-            </a:r>
-          </a:p>
-          <a:p>
-            <a:pPr marL="742950" lvl="1" indent="-285750">
-              <a:buFont typeface="+mj-lt"/>
-              <a:buAutoNum type="arabicPeriod"/>
-            </a:pPr>
-            <a:r>
-              <a:rPr lang="en-US" sz="1900" dirty="0"/>
-              <a:t>All rows from the left table.</a:t>
-            </a:r>
-          </a:p>
-          <a:p>
-            <a:pPr marL="742950" lvl="1" indent="-285750">
-              <a:buFont typeface="+mj-lt"/>
-              <a:buAutoNum type="arabicPeriod"/>
-            </a:pPr>
-            <a:r>
-              <a:rPr lang="en-US" sz="1900" dirty="0"/>
-              <a:t>All rows from the right table.</a:t>
-            </a:r>
-          </a:p>
-          <a:p>
-            <a:pPr marL="742950" lvl="1" indent="-285750">
-              <a:buFont typeface="+mj-lt"/>
-              <a:buAutoNum type="arabicPeriod"/>
-            </a:pPr>
-            <a:r>
-              <a:rPr lang="en-US" sz="1900" dirty="0"/>
-              <a:t>Combined rows where a match exists.</a:t>
-            </a:r>
-          </a:p>
-          <a:p>
-            <a:pPr marL="0" indent="0">
-              <a:buNone/>
-            </a:pPr>
-            <a:endParaRPr lang="en-US" sz="2400" dirty="0"/>
-          </a:p>
-        </p:txBody>
-      </p:sp>
+              <a:rPr lang="en-US" sz="1800" dirty="0"/>
+              <a:t>SELECT </a:t>
+            </a:r>
+            <a:r>
+              <a:rPr lang="en-US" sz="1800" dirty="0" err="1"/>
+              <a:t>e.last_name</a:t>
+            </a:r>
+            <a:r>
+              <a:rPr lang="en-US" sz="1800" dirty="0"/>
+              <a:t>, </a:t>
+            </a:r>
+            <a:r>
+              <a:rPr lang="en-US" sz="1800" dirty="0" err="1"/>
+              <a:t>e.first_name</a:t>
+            </a:r>
+            <a:r>
+              <a:rPr lang="en-US" sz="1800" dirty="0"/>
+              <a:t>, </a:t>
+            </a:r>
+            <a:r>
+              <a:rPr lang="en-US" sz="1800" dirty="0" err="1"/>
+              <a:t>m.last_name</a:t>
+            </a:r>
+            <a:r>
+              <a:rPr lang="en-US" sz="1800" dirty="0"/>
+              <a:t> AS 'Manager Last Name', </a:t>
+            </a:r>
+            <a:r>
+              <a:rPr lang="en-US" sz="1800" dirty="0" err="1"/>
+              <a:t>m.first_name</a:t>
+            </a:r>
+            <a:r>
+              <a:rPr lang="en-US" sz="1800" dirty="0"/>
+              <a:t>  AS 'Manager First Name'</a:t>
+            </a:r>
+          </a:p>
+          <a:p>
+            <a:pPr marL="0" indent="0">
+              <a:buNone/>
+            </a:pPr>
+            <a:r>
+              <a:rPr lang="en-US" sz="1800" dirty="0"/>
+              <a:t>FROM employees e</a:t>
+            </a:r>
+          </a:p>
+          <a:p>
+            <a:pPr marL="0" indent="0">
+              <a:buNone/>
+            </a:pPr>
+            <a:r>
+              <a:rPr lang="en-US" sz="1800" dirty="0"/>
+              <a:t>JOIN employees m ON </a:t>
+            </a:r>
+            <a:r>
+              <a:rPr lang="en-US" sz="1800" dirty="0" err="1"/>
+              <a:t>e.manager_Id</a:t>
+            </a:r>
+            <a:r>
+              <a:rPr lang="en-US" sz="1800" dirty="0"/>
+              <a:t> = </a:t>
+            </a:r>
+            <a:r>
+              <a:rPr lang="en-US" sz="1800" dirty="0" err="1"/>
+              <a:t>m.employee_Id</a:t>
+            </a:r>
+            <a:r>
+              <a:rPr lang="en-US" sz="1800" dirty="0"/>
+              <a:t>;</a:t>
+            </a:r>
+          </a:p>
+          <a:p>
+            <a:pPr marL="0" indent="0">
+              <a:buNone/>
+            </a:pPr>
+            <a:endParaRPr lang="en-US" sz="1800" dirty="0"/>
+          </a:p>
+          <a:p>
+            <a:pPr marL="0" indent="0">
+              <a:buNone/>
+            </a:pPr>
+            <a:endParaRPr lang="en-US" sz="1800" dirty="0"/>
+          </a:p>
+          <a:p>
+            <a:pPr marL="0" indent="0">
+              <a:buNone/>
+            </a:pPr>
+            <a:endParaRPr lang="en-US" sz="1800" dirty="0"/>
+          </a:p>
+          <a:p>
+            <a:pPr marL="0" indent="0">
+              <a:buNone/>
+            </a:pPr>
+            <a:endParaRPr lang="en-US" sz="1800" dirty="0"/>
+          </a:p>
+          <a:p>
+            <a:pPr marL="0" indent="0">
+              <a:buNone/>
+            </a:pPr>
+            <a:endParaRPr lang="en-US" sz="1800" dirty="0"/>
+          </a:p>
+          <a:p>
+            <a:pPr marL="0" indent="0">
+              <a:buNone/>
+            </a:pPr>
+            <a:endParaRPr lang="en-US" sz="1800" dirty="0"/>
+          </a:p>
+          <a:p>
+            <a:pPr marL="0" indent="0">
+              <a:buNone/>
+            </a:pPr>
+            <a:endParaRPr lang="en-US" sz="1800" dirty="0"/>
+          </a:p>
+          <a:p>
+            <a:pPr marL="0" indent="0">
+              <a:buNone/>
+            </a:pPr>
+            <a:r>
+              <a:rPr lang="en-US" sz="1800" dirty="0"/>
+              <a:t>Note when joining a table to itself you must use table aliases, i.e. employees </a:t>
+            </a:r>
+            <a:r>
+              <a:rPr lang="en-US" sz="1800" b="1" dirty="0"/>
+              <a:t>e</a:t>
+            </a:r>
+            <a:r>
+              <a:rPr lang="en-US" sz="1800" dirty="0"/>
+              <a:t> and employees </a:t>
+            </a:r>
+            <a:r>
+              <a:rPr lang="en-US" sz="1800" b="1" dirty="0"/>
+              <a:t>m</a:t>
+            </a:r>
+          </a:p>
+          <a:p>
+            <a:pPr marL="0" indent="0">
+              <a:buNone/>
+            </a:pPr>
+            <a:endParaRPr lang="en-US" sz="1800" dirty="0"/>
+          </a:p>
+          <a:p>
+            <a:pPr marL="0" indent="0">
+              <a:buNone/>
+            </a:pPr>
+            <a:endParaRPr lang="en-US" sz="1800" dirty="0"/>
+          </a:p>
+        </p:txBody>
+      </p:sp>
+      <p:pic>
+        <p:nvPicPr>
+          <p:cNvPr id="5" name="Picture 4">
+            <a:extLst>
+              <a:ext uri="{FF2B5EF4-FFF2-40B4-BE49-F238E27FC236}">
+                <a16:creationId xmlns:a16="http://schemas.microsoft.com/office/drawing/2014/main" id="{BED3799A-DDB3-4734-79D4-33EF109DAAD3}"/>
+              </a:ext>
+            </a:extLst>
+          </p:cNvPr>
+          <p:cNvPicPr>
+            <a:picLocks noChangeAspect="1"/>
+          </p:cNvPicPr>
+          <p:nvPr/>
+        </p:nvPicPr>
+        <p:blipFill>
+          <a:blip r:embed="rId2"/>
+          <a:stretch>
+            <a:fillRect/>
+          </a:stretch>
+        </p:blipFill>
+        <p:spPr>
+          <a:xfrm>
+            <a:off x="1044685" y="3436143"/>
+            <a:ext cx="6641246" cy="1535249"/>
+          </a:xfrm>
+          <a:prstGeom prst="rect">
+            <a:avLst/>
+          </a:prstGeom>
+        </p:spPr>
+      </p:pic>
     </p:spTree>
     <p:extLst>
       <p:ext uri="{BB962C8B-B14F-4D97-AF65-F5344CB8AC3E}">
-        <p14:creationId xmlns:p14="http://schemas.microsoft.com/office/powerpoint/2010/main" val="437247387"/>
+        <p14:creationId xmlns:p14="http://schemas.microsoft.com/office/powerpoint/2010/main" val="2549032234"/>
       </p:ext>
     </p:extLst>
   </p:cSld>
@@ -7434,7 +7508,7 @@
           <p:cNvPr id="2" name="Title 1">
             <a:extLst>
               <a:ext uri="{FF2B5EF4-FFF2-40B4-BE49-F238E27FC236}">
-                <a16:creationId xmlns:a16="http://schemas.microsoft.com/office/drawing/2014/main" id="{1B8E7243-09DE-85F1-890F-FBB678B3AC5C}"/>
+                <a16:creationId xmlns:a16="http://schemas.microsoft.com/office/drawing/2014/main" id="{5A86A0F1-1AEB-7FC5-D33A-8CA65721468B}"/>
               </a:ext>
             </a:extLst>
           </p:cNvPr>
@@ -7452,7 +7526,7 @@
           <a:p>
             <a:r>
               <a:rPr lang="en-US" dirty="0"/>
-              <a:t>FULL JOIN Example:</a:t>
+              <a:t>FULL OUTER JOIN	</a:t>
             </a:r>
           </a:p>
         </p:txBody>
@@ -7462,7 +7536,7 @@
           <p:cNvPr id="3" name="Content Placeholder 2">
             <a:extLst>
               <a:ext uri="{FF2B5EF4-FFF2-40B4-BE49-F238E27FC236}">
-                <a16:creationId xmlns:a16="http://schemas.microsoft.com/office/drawing/2014/main" id="{6294D5EC-9CBF-50DE-0AFB-3548B5BD5734}"/>
+                <a16:creationId xmlns:a16="http://schemas.microsoft.com/office/drawing/2014/main" id="{3D5C31E2-5C49-0229-28C7-1BC2B4668A62}"/>
               </a:ext>
             </a:extLst>
           </p:cNvPr>
@@ -7475,114 +7549,142 @@
         </p:nvSpPr>
         <p:spPr/>
         <p:txBody>
-          <a:bodyPr/>
+          <a:bodyPr>
+            <a:normAutofit lnSpcReduction="10000"/>
+          </a:bodyPr>
           <a:lstStyle/>
           <a:p>
             <a:pPr marL="0" indent="0">
               <a:buNone/>
             </a:pPr>
             <a:r>
-              <a:rPr lang="en-US" dirty="0"/>
-              <a:t>SELECT </a:t>
-            </a:r>
-            <a:r>
-              <a:rPr lang="en-US" dirty="0" err="1"/>
-              <a:t>lastName</a:t>
-            </a:r>
-            <a:r>
-              <a:rPr lang="en-US" dirty="0"/>
-              <a:t>, </a:t>
-            </a:r>
-            <a:r>
-              <a:rPr lang="en-US" dirty="0" err="1"/>
-              <a:t>firstName</a:t>
-            </a:r>
-            <a:r>
-              <a:rPr lang="en-US" dirty="0"/>
-              <a:t>, </a:t>
-            </a:r>
-            <a:r>
-              <a:rPr lang="en-US" dirty="0" err="1"/>
-              <a:t>deptName</a:t>
-            </a:r>
-            <a:endParaRPr lang="en-US" dirty="0"/>
-          </a:p>
-          <a:p>
-            <a:pPr marL="0" indent="0">
-              <a:buNone/>
-            </a:pPr>
-            <a:r>
-              <a:rPr lang="en-US" dirty="0"/>
-              <a:t>FROM employees e</a:t>
-            </a:r>
-          </a:p>
-          <a:p>
-            <a:pPr marL="0" indent="0">
-              <a:buNone/>
-            </a:pPr>
-            <a:r>
-              <a:rPr lang="en-US" dirty="0"/>
-              <a:t>FULL JOIN departments d ON </a:t>
-            </a:r>
-            <a:r>
-              <a:rPr lang="en-US" dirty="0" err="1"/>
-              <a:t>e.deptId</a:t>
-            </a:r>
-            <a:r>
-              <a:rPr lang="en-US" dirty="0"/>
-              <a:t> = </a:t>
-            </a:r>
-            <a:r>
-              <a:rPr lang="en-US" dirty="0" err="1"/>
-              <a:t>d.deptId</a:t>
-            </a:r>
-            <a:r>
-              <a:rPr lang="en-US" dirty="0"/>
-              <a:t>;</a:t>
-            </a:r>
-          </a:p>
-          <a:p>
-            <a:pPr marL="0" indent="0">
-              <a:buNone/>
-            </a:pPr>
-            <a:endParaRPr lang="en-US" dirty="0"/>
-          </a:p>
-        </p:txBody>
-      </p:sp>
-      <p:pic>
-        <p:nvPicPr>
-          <p:cNvPr id="5" name="Picture 4" descr="A screenshot of a computer&#10;&#10;Description automatically generated">
-            <a:extLst>
-              <a:ext uri="{FF2B5EF4-FFF2-40B4-BE49-F238E27FC236}">
-                <a16:creationId xmlns:a16="http://schemas.microsoft.com/office/drawing/2014/main" id="{58D33C67-E82E-977F-BD73-6077042A8AA0}"/>
-              </a:ext>
-            </a:extLst>
-          </p:cNvPr>
-          <p:cNvPicPr>
-            <a:picLocks noChangeAspect="1"/>
-          </p:cNvPicPr>
-          <p:nvPr/>
-        </p:nvPicPr>
-        <p:blipFill>
-          <a:blip r:embed="rId2"/>
-          <a:stretch>
-            <a:fillRect/>
-          </a:stretch>
-        </p:blipFill>
-        <p:spPr>
-          <a:xfrm>
-            <a:off x="1403350" y="3544062"/>
-            <a:ext cx="4028186" cy="2725454"/>
-          </a:xfrm>
-          <a:prstGeom prst="rect">
-            <a:avLst/>
-          </a:prstGeom>
-        </p:spPr>
-      </p:pic>
+              <a:rPr lang="en-US" sz="2400" dirty="0"/>
+              <a:t>A </a:t>
+            </a:r>
+            <a:r>
+              <a:rPr lang="en-US" sz="2400" b="1" dirty="0"/>
+              <a:t>full outer join</a:t>
+            </a:r>
+            <a:r>
+              <a:rPr lang="en-US" sz="2400" dirty="0"/>
+              <a:t> is a type of SQL join that combines the results of a </a:t>
+            </a:r>
+            <a:r>
+              <a:rPr lang="en-US" sz="2400" b="1" dirty="0"/>
+              <a:t>left join</a:t>
+            </a:r>
+            <a:r>
+              <a:rPr lang="en-US" sz="2400" dirty="0"/>
+              <a:t> and a </a:t>
+            </a:r>
+            <a:r>
+              <a:rPr lang="en-US" sz="2400" b="1" dirty="0"/>
+              <a:t>right join</a:t>
+            </a:r>
+            <a:r>
+              <a:rPr lang="en-US" sz="2400" dirty="0"/>
+              <a:t>. It returns all records from both tables, matching rows where there is a match between the two tables' keys and including NULLs where no match is found.</a:t>
+            </a:r>
+          </a:p>
+          <a:p>
+            <a:pPr marL="0" indent="0">
+              <a:buNone/>
+            </a:pPr>
+            <a:endParaRPr lang="en-US" sz="2400" dirty="0"/>
+          </a:p>
+          <a:p>
+            <a:pPr marL="0" indent="0">
+              <a:buNone/>
+            </a:pPr>
+            <a:r>
+              <a:rPr lang="en-US" sz="1900" b="1" u="sng" dirty="0"/>
+              <a:t>Key Points:</a:t>
+            </a:r>
+          </a:p>
+          <a:p>
+            <a:pPr>
+              <a:buFont typeface="+mj-lt"/>
+              <a:buAutoNum type="arabicPeriod"/>
+            </a:pPr>
+            <a:r>
+              <a:rPr lang="en-US" sz="1900" b="1" dirty="0"/>
+              <a:t>Matching Rows</a:t>
+            </a:r>
+            <a:r>
+              <a:rPr lang="en-US" sz="1900" dirty="0"/>
+              <a:t>: Where a match exists between the two tables, rows are combined.</a:t>
+            </a:r>
+          </a:p>
+          <a:p>
+            <a:pPr>
+              <a:buFont typeface="+mj-lt"/>
+              <a:buAutoNum type="arabicPeriod"/>
+            </a:pPr>
+            <a:r>
+              <a:rPr lang="en-US" sz="1900" b="1" dirty="0"/>
+              <a:t>Non-Matching Rows</a:t>
+            </a:r>
+            <a:r>
+              <a:rPr lang="en-US" sz="1900" dirty="0"/>
+              <a:t>: Rows with no match in either table are included in the result, with NULLs for the missing columns.</a:t>
+            </a:r>
+          </a:p>
+          <a:p>
+            <a:pPr>
+              <a:buFont typeface="+mj-lt"/>
+              <a:buAutoNum type="arabicPeriod"/>
+            </a:pPr>
+            <a:r>
+              <a:rPr lang="en-US" sz="1900" b="1" dirty="0"/>
+              <a:t>Result</a:t>
+            </a:r>
+            <a:r>
+              <a:rPr lang="en-US" sz="1900" dirty="0"/>
+              <a:t>: The result includes:</a:t>
+            </a:r>
+          </a:p>
+          <a:p>
+            <a:pPr marL="742950" lvl="1" indent="-285750">
+              <a:buFont typeface="+mj-lt"/>
+              <a:buAutoNum type="arabicPeriod"/>
+            </a:pPr>
+            <a:r>
+              <a:rPr lang="en-US" sz="1900" dirty="0"/>
+              <a:t>All rows from the left table.</a:t>
+            </a:r>
+          </a:p>
+          <a:p>
+            <a:pPr marL="742950" lvl="1" indent="-285750">
+              <a:buFont typeface="+mj-lt"/>
+              <a:buAutoNum type="arabicPeriod"/>
+            </a:pPr>
+            <a:r>
+              <a:rPr lang="en-US" sz="1900" dirty="0"/>
+              <a:t>All rows from the right table.</a:t>
+            </a:r>
+          </a:p>
+          <a:p>
+            <a:pPr marL="742950" lvl="1" indent="-285750">
+              <a:buFont typeface="+mj-lt"/>
+              <a:buAutoNum type="arabicPeriod"/>
+            </a:pPr>
+            <a:r>
+              <a:rPr lang="en-US" sz="1900" dirty="0"/>
+              <a:t>Combined rows where a match exists.</a:t>
+            </a:r>
+          </a:p>
+          <a:p>
+            <a:pPr marL="0" indent="0">
+              <a:buNone/>
+            </a:pPr>
+            <a:endParaRPr lang="en-US" sz="2400" dirty="0"/>
+          </a:p>
+        </p:txBody>
+      </p:sp>
     </p:spTree>
     <p:extLst>
       <p:ext uri="{BB962C8B-B14F-4D97-AF65-F5344CB8AC3E}">
-        <p14:creationId xmlns:p14="http://schemas.microsoft.com/office/powerpoint/2010/main" val="798568878"/>
+        <p14:creationId xmlns:p14="http://schemas.microsoft.com/office/powerpoint/2010/main" val="437247387"/>
       </p:ext>
     </p:extLst>
   </p:cSld>
@@ -7614,7 +7716,7 @@
           <p:cNvPr id="2" name="Title 1">
             <a:extLst>
               <a:ext uri="{FF2B5EF4-FFF2-40B4-BE49-F238E27FC236}">
-                <a16:creationId xmlns:a16="http://schemas.microsoft.com/office/drawing/2014/main" id="{C07C7959-6FBB-BE73-5D4C-73283102D159}"/>
+                <a16:creationId xmlns:a16="http://schemas.microsoft.com/office/drawing/2014/main" id="{1B8E7243-09DE-85F1-890F-FBB678B3AC5C}"/>
               </a:ext>
             </a:extLst>
           </p:cNvPr>
@@ -7632,7 +7734,7 @@
           <a:p>
             <a:r>
               <a:rPr lang="en-US" dirty="0"/>
-              <a:t>FULL JOIN in MySQL</a:t>
+              <a:t>FULL JOIN Example:</a:t>
             </a:r>
           </a:p>
         </p:txBody>
@@ -7642,7 +7744,7 @@
           <p:cNvPr id="3" name="Content Placeholder 2">
             <a:extLst>
               <a:ext uri="{FF2B5EF4-FFF2-40B4-BE49-F238E27FC236}">
-                <a16:creationId xmlns:a16="http://schemas.microsoft.com/office/drawing/2014/main" id="{772B7178-064E-F69C-DBCD-31768BE15779}"/>
+                <a16:creationId xmlns:a16="http://schemas.microsoft.com/office/drawing/2014/main" id="{6294D5EC-9CBF-50DE-0AFB-3548B5BD5734}"/>
               </a:ext>
             </a:extLst>
           </p:cNvPr>
@@ -7653,172 +7755,116 @@
             <p:ph idx="1"/>
           </p:nvPr>
         </p:nvSpPr>
+        <p:spPr/>
+        <p:txBody>
+          <a:bodyPr/>
+          <a:lstStyle/>
+          <a:p>
+            <a:pPr marL="0" indent="0">
+              <a:buNone/>
+            </a:pPr>
+            <a:r>
+              <a:rPr lang="en-US" dirty="0"/>
+              <a:t>SELECT </a:t>
+            </a:r>
+            <a:r>
+              <a:rPr lang="en-US" dirty="0" err="1"/>
+              <a:t>last_name</a:t>
+            </a:r>
+            <a:r>
+              <a:rPr lang="en-US" dirty="0"/>
+              <a:t>, </a:t>
+            </a:r>
+            <a:r>
+              <a:rPr lang="en-US" dirty="0" err="1"/>
+              <a:t>first_name</a:t>
+            </a:r>
+            <a:r>
+              <a:rPr lang="en-US" dirty="0"/>
+              <a:t>, </a:t>
+            </a:r>
+            <a:r>
+              <a:rPr lang="en-US" dirty="0" err="1"/>
+              <a:t>dept_name</a:t>
+            </a:r>
+            <a:endParaRPr lang="en-US" dirty="0"/>
+          </a:p>
+          <a:p>
+            <a:pPr marL="0" indent="0">
+              <a:buNone/>
+            </a:pPr>
+            <a:r>
+              <a:rPr lang="en-US" dirty="0"/>
+              <a:t>FROM employees e</a:t>
+            </a:r>
+          </a:p>
+          <a:p>
+            <a:pPr marL="0" indent="0">
+              <a:buNone/>
+            </a:pPr>
+            <a:r>
+              <a:rPr lang="en-US" dirty="0"/>
+              <a:t>FULL JOIN departments d ON </a:t>
+            </a:r>
+            <a:r>
+              <a:rPr lang="en-US" dirty="0" err="1"/>
+              <a:t>e.dept_id</a:t>
+            </a:r>
+            <a:r>
+              <a:rPr lang="en-US" dirty="0"/>
+              <a:t> = </a:t>
+            </a:r>
+            <a:r>
+              <a:rPr lang="en-US" dirty="0" err="1"/>
+              <a:t>d.dept_id</a:t>
+            </a:r>
+            <a:r>
+              <a:rPr lang="en-US" dirty="0"/>
+              <a:t>;</a:t>
+            </a:r>
+          </a:p>
+          <a:p>
+            <a:pPr marL="0" indent="0">
+              <a:buNone/>
+            </a:pPr>
+            <a:endParaRPr lang="en-US" dirty="0"/>
+          </a:p>
+        </p:txBody>
+      </p:sp>
+      <p:pic>
+        <p:nvPicPr>
+          <p:cNvPr id="6" name="Picture 5">
+            <a:extLst>
+              <a:ext uri="{FF2B5EF4-FFF2-40B4-BE49-F238E27FC236}">
+                <a16:creationId xmlns:a16="http://schemas.microsoft.com/office/drawing/2014/main" id="{F2656CB5-37EE-DEB9-7218-D0845F886CBD}"/>
+              </a:ext>
+            </a:extLst>
+          </p:cNvPr>
+          <p:cNvPicPr>
+            <a:picLocks noChangeAspect="1"/>
+          </p:cNvPicPr>
+          <p:nvPr/>
+        </p:nvPicPr>
+        <p:blipFill>
+          <a:blip r:embed="rId2"/>
+          <a:stretch>
+            <a:fillRect/>
+          </a:stretch>
+        </p:blipFill>
         <p:spPr>
           <a:xfrm>
-            <a:off x="838200" y="1807337"/>
-            <a:ext cx="10515600" cy="4351338"/>
+            <a:off x="838200" y="3591690"/>
+            <a:ext cx="5699234" cy="2782829"/>
           </a:xfrm>
+          <a:prstGeom prst="rect">
+            <a:avLst/>
+          </a:prstGeom>
         </p:spPr>
-        <p:txBody>
-          <a:bodyPr>
-            <a:normAutofit lnSpcReduction="10000"/>
-          </a:bodyPr>
-          <a:lstStyle/>
-          <a:p>
-            <a:pPr marL="0" indent="0">
-              <a:buNone/>
-            </a:pPr>
-            <a:r>
-              <a:rPr lang="en-US" dirty="0"/>
-              <a:t>Unfortunately MySQL doesn’t support FULL JOIN however you can emulate one with a UNION.</a:t>
-            </a:r>
-          </a:p>
-          <a:p>
-            <a:pPr marL="0" indent="0">
-              <a:buNone/>
-            </a:pPr>
-            <a:endParaRPr lang="en-US" dirty="0"/>
-          </a:p>
-          <a:p>
-            <a:pPr marL="0" indent="0">
-              <a:buNone/>
-            </a:pPr>
-            <a:r>
-              <a:rPr lang="en-US" sz="2400" dirty="0"/>
-              <a:t>SELECT </a:t>
-            </a:r>
-            <a:r>
-              <a:rPr lang="en-US" sz="2400" dirty="0" err="1"/>
-              <a:t>lastName</a:t>
-            </a:r>
-            <a:r>
-              <a:rPr lang="en-US" sz="2400" dirty="0"/>
-              <a:t>, </a:t>
-            </a:r>
-            <a:r>
-              <a:rPr lang="en-US" sz="2400" dirty="0" err="1"/>
-              <a:t>firstName</a:t>
-            </a:r>
-            <a:r>
-              <a:rPr lang="en-US" sz="2400" dirty="0"/>
-              <a:t>, </a:t>
-            </a:r>
-            <a:r>
-              <a:rPr lang="en-US" sz="2400" dirty="0" err="1"/>
-              <a:t>deptName</a:t>
-            </a:r>
-            <a:endParaRPr lang="en-US" sz="2400" dirty="0"/>
-          </a:p>
-          <a:p>
-            <a:pPr marL="0" indent="0">
-              <a:buNone/>
-            </a:pPr>
-            <a:r>
-              <a:rPr lang="en-US" sz="2400" dirty="0"/>
-              <a:t>FROM employees e</a:t>
-            </a:r>
-          </a:p>
-          <a:p>
-            <a:pPr marL="0" indent="0">
-              <a:buNone/>
-            </a:pPr>
-            <a:r>
-              <a:rPr lang="en-US" sz="2400" dirty="0"/>
-              <a:t>LEFT JOIN departments d ON </a:t>
-            </a:r>
-            <a:r>
-              <a:rPr lang="en-US" sz="2400" dirty="0" err="1"/>
-              <a:t>e.deptId</a:t>
-            </a:r>
-            <a:r>
-              <a:rPr lang="en-US" sz="2400" dirty="0"/>
-              <a:t> = </a:t>
-            </a:r>
-            <a:r>
-              <a:rPr lang="en-US" sz="2400" dirty="0" err="1"/>
-              <a:t>d.deptId</a:t>
-            </a:r>
-            <a:endParaRPr lang="en-US" sz="2400" dirty="0"/>
-          </a:p>
-          <a:p>
-            <a:pPr marL="0" indent="0">
-              <a:buNone/>
-            </a:pPr>
-            <a:r>
-              <a:rPr lang="en-US" sz="2400" dirty="0"/>
-              <a:t>UNION</a:t>
-            </a:r>
-          </a:p>
-          <a:p>
-            <a:pPr marL="0" indent="0">
-              <a:buNone/>
-            </a:pPr>
-            <a:r>
-              <a:rPr lang="en-US" sz="2400" dirty="0"/>
-              <a:t>SELECT </a:t>
-            </a:r>
-            <a:r>
-              <a:rPr lang="en-US" sz="2400" dirty="0" err="1"/>
-              <a:t>lastName</a:t>
-            </a:r>
-            <a:r>
-              <a:rPr lang="en-US" sz="2400" dirty="0"/>
-              <a:t>, </a:t>
-            </a:r>
-            <a:r>
-              <a:rPr lang="en-US" sz="2400" dirty="0" err="1"/>
-              <a:t>firstName</a:t>
-            </a:r>
-            <a:r>
-              <a:rPr lang="en-US" sz="2400" dirty="0"/>
-              <a:t>, </a:t>
-            </a:r>
-            <a:r>
-              <a:rPr lang="en-US" sz="2400" dirty="0" err="1"/>
-              <a:t>deptName</a:t>
-            </a:r>
-            <a:endParaRPr lang="en-US" sz="2400" dirty="0"/>
-          </a:p>
-          <a:p>
-            <a:pPr marL="0" indent="0">
-              <a:buNone/>
-            </a:pPr>
-            <a:r>
-              <a:rPr lang="en-US" sz="2400" dirty="0"/>
-              <a:t>FROM employees e</a:t>
-            </a:r>
-          </a:p>
-          <a:p>
-            <a:pPr marL="0" indent="0">
-              <a:buNone/>
-            </a:pPr>
-            <a:r>
-              <a:rPr lang="en-US" sz="2400" dirty="0"/>
-              <a:t>RIGHT JOIN departments d ON </a:t>
-            </a:r>
-            <a:r>
-              <a:rPr lang="en-US" sz="2400" dirty="0" err="1"/>
-              <a:t>e.deptId</a:t>
-            </a:r>
-            <a:r>
-              <a:rPr lang="en-US" sz="2400" dirty="0"/>
-              <a:t> = </a:t>
-            </a:r>
-            <a:r>
-              <a:rPr lang="en-US" sz="2400" dirty="0" err="1"/>
-              <a:t>d.deptId</a:t>
-            </a:r>
-            <a:r>
-              <a:rPr lang="en-US" sz="2400" dirty="0"/>
-              <a:t>;</a:t>
-            </a:r>
-          </a:p>
-        </p:txBody>
-      </p:sp>
+      </p:pic>
     </p:spTree>
     <p:extLst>
       <p:ext uri="{BB962C8B-B14F-4D97-AF65-F5344CB8AC3E}">
-        <p14:creationId xmlns:p14="http://schemas.microsoft.com/office/powerpoint/2010/main" val="1098663454"/>
+        <p14:creationId xmlns:p14="http://schemas.microsoft.com/office/powerpoint/2010/main" val="798568878"/>
       </p:ext>
     </p:extLst>
   </p:cSld>
@@ -7905,7 +7951,7 @@
             </a:r>
             <a:r>
               <a:rPr lang="en-US" dirty="0" err="1"/>
-              <a:t>deptName</a:t>
+              <a:t>dept_name</a:t>
             </a:r>
             <a:r>
               <a:rPr lang="en-US" dirty="0"/>
@@ -7913,7 +7959,7 @@
             </a:r>
             <a:r>
               <a:rPr lang="en-US" dirty="0" err="1"/>
-              <a:t>m.lastName</a:t>
+              <a:t>m.last_name</a:t>
             </a:r>
             <a:r>
               <a:rPr lang="en-US" dirty="0"/>
@@ -7921,7 +7967,7 @@
             </a:r>
             <a:r>
               <a:rPr lang="en-US" dirty="0" err="1"/>
-              <a:t>m.firstName</a:t>
+              <a:t>m.first_name</a:t>
             </a:r>
             <a:r>
               <a:rPr lang="en-US" dirty="0"/>
@@ -7938,7 +7984,7 @@
             </a:r>
             <a:r>
               <a:rPr lang="en-US" dirty="0" err="1"/>
-              <a:t>e.lastName</a:t>
+              <a:t>e.last_name</a:t>
             </a:r>
             <a:r>
               <a:rPr lang="en-US" dirty="0"/>
@@ -7946,7 +7992,7 @@
             </a:r>
             <a:r>
               <a:rPr lang="en-US" dirty="0" err="1"/>
-              <a:t>e.firstName</a:t>
+              <a:t>e.first_name</a:t>
             </a:r>
             <a:r>
               <a:rPr lang="en-US" dirty="0"/>
@@ -7972,7 +8018,7 @@
             </a:r>
             <a:r>
               <a:rPr lang="en-US" dirty="0" err="1"/>
-              <a:t>m.deptId</a:t>
+              <a:t>m.dept_Id</a:t>
             </a:r>
             <a:r>
               <a:rPr lang="en-US" dirty="0"/>
@@ -7980,7 +8026,7 @@
             </a:r>
             <a:r>
               <a:rPr lang="en-US" dirty="0" err="1"/>
-              <a:t>d.deptId</a:t>
+              <a:t>d.dept_Id</a:t>
             </a:r>
             <a:endParaRPr lang="en-US" dirty="0"/>
           </a:p>
@@ -7994,7 +8040,7 @@
             </a:r>
             <a:r>
               <a:rPr lang="en-US" dirty="0" err="1"/>
-              <a:t>e.managerId</a:t>
+              <a:t>e.manager_id</a:t>
             </a:r>
             <a:r>
               <a:rPr lang="en-US" dirty="0"/>
@@ -8002,7 +8048,7 @@
             </a:r>
             <a:r>
               <a:rPr lang="en-US" dirty="0" err="1"/>
-              <a:t>d.managerId</a:t>
+              <a:t>d.manager_id</a:t>
             </a:r>
             <a:endParaRPr lang="en-US" dirty="0"/>
           </a:p>
@@ -8012,8 +8058,13 @@
             </a:pPr>
             <a:r>
               <a:rPr lang="en-US" dirty="0"/>
-              <a:t>UNION</a:t>
-            </a:r>
+              <a:t>UNION – work around for full </a:t>
+            </a:r>
+            <a:r>
+              <a:rPr lang="en-US"/>
+              <a:t>outer join.</a:t>
+            </a:r>
+            <a:endParaRPr lang="en-US" dirty="0"/>
           </a:p>
           <a:p>
             <a:pPr marL="0" indent="0">
@@ -8025,7 +8076,7 @@
             </a:r>
             <a:r>
               <a:rPr lang="en-US" dirty="0" err="1"/>
-              <a:t>deptName</a:t>
+              <a:t>dept_name</a:t>
             </a:r>
             <a:r>
               <a:rPr lang="en-US" dirty="0"/>
@@ -8033,7 +8084,7 @@
             </a:r>
             <a:r>
               <a:rPr lang="en-US" dirty="0" err="1"/>
-              <a:t>m.lastName</a:t>
+              <a:t>m.last_name</a:t>
             </a:r>
             <a:r>
               <a:rPr lang="en-US" dirty="0"/>
@@ -8041,7 +8092,7 @@
             </a:r>
             <a:r>
               <a:rPr lang="en-US" dirty="0" err="1"/>
-              <a:t>m.firstName</a:t>
+              <a:t>m.first_name</a:t>
             </a:r>
             <a:r>
               <a:rPr lang="en-US" dirty="0"/>
@@ -8058,7 +8109,7 @@
             </a:r>
             <a:r>
               <a:rPr lang="en-US" dirty="0" err="1"/>
-              <a:t>e.lastName</a:t>
+              <a:t>e.last_name</a:t>
             </a:r>
             <a:r>
               <a:rPr lang="en-US" dirty="0"/>
@@ -8066,7 +8117,7 @@
             </a:r>
             <a:r>
               <a:rPr lang="en-US" dirty="0" err="1"/>
-              <a:t>e.firstName</a:t>
+              <a:t>e.first_name</a:t>
             </a:r>
             <a:r>
               <a:rPr lang="en-US" dirty="0"/>
@@ -8092,7 +8143,7 @@
             </a:r>
             <a:r>
               <a:rPr lang="en-US" dirty="0" err="1"/>
-              <a:t>m.deptId</a:t>
+              <a:t>m.dept_id</a:t>
             </a:r>
             <a:r>
               <a:rPr lang="en-US" dirty="0"/>
@@ -8100,7 +8151,7 @@
             </a:r>
             <a:r>
               <a:rPr lang="en-US" dirty="0" err="1"/>
-              <a:t>d.deptId</a:t>
+              <a:t>d.dept_id</a:t>
             </a:r>
             <a:endParaRPr lang="en-US" dirty="0"/>
           </a:p>
@@ -8114,7 +8165,7 @@
             </a:r>
             <a:r>
               <a:rPr lang="en-US" dirty="0" err="1"/>
-              <a:t>e.managerId</a:t>
+              <a:t>e.manager_id</a:t>
             </a:r>
             <a:r>
               <a:rPr lang="en-US" dirty="0"/>
@@ -8122,7 +8173,7 @@
             </a:r>
             <a:r>
               <a:rPr lang="en-US" dirty="0" err="1"/>
-              <a:t>d.managerId</a:t>
+              <a:t>d.manager_id</a:t>
             </a:r>
             <a:endParaRPr lang="en-US" dirty="0"/>
           </a:p>
